--- a/Salesforce_AgentForce_Healthcare_UseCase.pptx
+++ b/Salesforce_AgentForce_Healthcare_UseCase.pptx
@@ -13,8 +13,9 @@
     <p:sldId id="261" r:id="rId7"/>
     <p:sldId id="262" r:id="rId8"/>
     <p:sldId id="263" r:id="rId9"/>
-    <p:sldId id="264" r:id="rId10"/>
-    <p:sldId id="265" r:id="rId11"/>
+    <p:sldId id="266" r:id="rId10"/>
+    <p:sldId id="264" r:id="rId11"/>
+    <p:sldId id="265" r:id="rId12"/>
   </p:sldIdLst>
   <p:sldSz cx="9144000" cy="6858000" type="screen4x3"/>
   <p:notesSz cx="6858000" cy="9144000"/>
@@ -13576,1122 +13577,6 @@
 </file>
 
 <file path=ppt/slides/slide10.xml><?xml version="1.0" encoding="utf-8"?>
-<p:sld xmlns:a="http://schemas.openxmlformats.org/drawingml/2006/main" xmlns:r="http://schemas.openxmlformats.org/officeDocument/2006/relationships" xmlns:p="http://schemas.openxmlformats.org/presentationml/2006/main">
-  <p:cSld>
-    <p:spTree>
-      <p:nvGrpSpPr>
-        <p:cNvPr id="1" name="">
-          <a:extLst>
-            <a:ext uri="{FF2B5EF4-FFF2-40B4-BE49-F238E27FC236}">
-              <a16:creationId xmlns:a16="http://schemas.microsoft.com/office/drawing/2014/main" id="{F4495289-D7BE-52FA-DA74-777E8777CB92}"/>
-            </a:ext>
-          </a:extLst>
-        </p:cNvPr>
-        <p:cNvGrpSpPr/>
-        <p:nvPr/>
-      </p:nvGrpSpPr>
-      <p:grpSpPr>
-        <a:xfrm>
-          <a:off x="0" y="0"/>
-          <a:ext cx="0" cy="0"/>
-          <a:chOff x="0" y="0"/>
-          <a:chExt cx="0" cy="0"/>
-        </a:xfrm>
-      </p:grpSpPr>
-      <p:sp>
-        <p:nvSpPr>
-          <p:cNvPr id="8" name="TextBox 7">
-            <a:extLst>
-              <a:ext uri="{FF2B5EF4-FFF2-40B4-BE49-F238E27FC236}">
-                <a16:creationId xmlns:a16="http://schemas.microsoft.com/office/drawing/2014/main" id="{E280C347-5837-461B-28C1-276D77990518}"/>
-              </a:ext>
-            </a:extLst>
-          </p:cNvPr>
-          <p:cNvSpPr txBox="1"/>
-          <p:nvPr/>
-        </p:nvSpPr>
-        <p:spPr>
-          <a:xfrm>
-            <a:off x="452966" y="598945"/>
-            <a:ext cx="8238067" cy="369332"/>
-          </a:xfrm>
-          <a:prstGeom prst="rect">
-            <a:avLst/>
-          </a:prstGeom>
-          <a:noFill/>
-        </p:spPr>
-        <p:txBody>
-          <a:bodyPr wrap="square" rtlCol="0">
-            <a:spAutoFit/>
-          </a:bodyPr>
-          <a:lstStyle/>
-          <a:p>
-            <a:r>
-              <a:rPr lang="en-IN" dirty="0">
-                <a:solidFill>
-                  <a:schemeClr val="bg1"/>
-                </a:solidFill>
-              </a:rPr>
-              <a:t>Example ROI Estimate over 12 months ** ( for a 500-bed Hospital )</a:t>
-            </a:r>
-          </a:p>
-        </p:txBody>
-      </p:sp>
-      <p:graphicFrame>
-        <p:nvGraphicFramePr>
-          <p:cNvPr id="9" name="Table 8">
-            <a:extLst>
-              <a:ext uri="{FF2B5EF4-FFF2-40B4-BE49-F238E27FC236}">
-                <a16:creationId xmlns:a16="http://schemas.microsoft.com/office/drawing/2014/main" id="{0EE202C8-C84C-BA15-A7D9-2BF440C5B574}"/>
-              </a:ext>
-            </a:extLst>
-          </p:cNvPr>
-          <p:cNvGraphicFramePr>
-            <a:graphicFrameLocks noGrp="1"/>
-          </p:cNvGraphicFramePr>
-          <p:nvPr>
-            <p:extLst>
-              <p:ext uri="{D42A27DB-BD31-4B8C-83A1-F6EECF244321}">
-                <p14:modId xmlns:p14="http://schemas.microsoft.com/office/powerpoint/2010/main" val="3106959707"/>
-              </p:ext>
-            </p:extLst>
-          </p:nvPr>
-        </p:nvGraphicFramePr>
-        <p:xfrm>
-          <a:off x="549931" y="1287821"/>
-          <a:ext cx="7806670" cy="4525963"/>
-        </p:xfrm>
-        <a:graphic>
-          <a:graphicData uri="http://schemas.openxmlformats.org/drawingml/2006/table">
-            <a:tbl>
-              <a:tblPr>
-                <a:tableStyleId>{5C22544A-7EE6-4342-B048-85BDC9FD1C3A}</a:tableStyleId>
-              </a:tblPr>
-              <a:tblGrid>
-                <a:gridCol w="3809841">
-                  <a:extLst>
-                    <a:ext uri="{9D8B030D-6E8A-4147-A177-3AD203B41FA5}">
-                      <a16:colId xmlns:a16="http://schemas.microsoft.com/office/drawing/2014/main" val="1300301816"/>
-                    </a:ext>
-                  </a:extLst>
-                </a:gridCol>
-                <a:gridCol w="3996829">
-                  <a:extLst>
-                    <a:ext uri="{9D8B030D-6E8A-4147-A177-3AD203B41FA5}">
-                      <a16:colId xmlns:a16="http://schemas.microsoft.com/office/drawing/2014/main" val="816146043"/>
-                    </a:ext>
-                  </a:extLst>
-                </a:gridCol>
-              </a:tblGrid>
-              <a:tr h="312135">
-                <a:tc>
-                  <a:txBody>
-                    <a:bodyPr/>
-                    <a:lstStyle/>
-                    <a:p>
-                      <a:pPr algn="ctr" fontAlgn="ctr"/>
-                      <a:r>
-                        <a:rPr lang="en-IN" sz="900" b="1" u="none" strike="noStrike">
-                          <a:effectLst/>
-                        </a:rPr>
-                        <a:t>Metric</a:t>
-                      </a:r>
-                      <a:endParaRPr lang="en-IN" sz="900" b="1" i="0" u="none" strike="noStrike">
-                        <a:solidFill>
-                          <a:srgbClr val="000000"/>
-                        </a:solidFill>
-                        <a:effectLst/>
-                        <a:latin typeface="Calibri" panose="020F0502020204030204" pitchFamily="34" charset="0"/>
-                      </a:endParaRPr>
-                    </a:p>
-                  </a:txBody>
-                  <a:tcPr marL="6503" marR="6503" marT="6503" marB="0" anchor="ctr"/>
-                </a:tc>
-                <a:tc>
-                  <a:txBody>
-                    <a:bodyPr/>
-                    <a:lstStyle/>
-                    <a:p>
-                      <a:pPr algn="ctr" fontAlgn="ctr"/>
-                      <a:r>
-                        <a:rPr lang="en-IN" sz="900" b="1" u="none" strike="noStrike" dirty="0">
-                          <a:effectLst/>
-                        </a:rPr>
-                        <a:t>Estimated Value</a:t>
-                      </a:r>
-                      <a:endParaRPr lang="en-IN" sz="900" b="1" i="0" u="none" strike="noStrike" dirty="0">
-                        <a:solidFill>
-                          <a:srgbClr val="000000"/>
-                        </a:solidFill>
-                        <a:effectLst/>
-                        <a:latin typeface="Calibri" panose="020F0502020204030204" pitchFamily="34" charset="0"/>
-                      </a:endParaRPr>
-                    </a:p>
-                  </a:txBody>
-                  <a:tcPr marL="6503" marR="6503" marT="6503" marB="0" anchor="ctr"/>
-                </a:tc>
-                <a:extLst>
-                  <a:ext uri="{0D108BD9-81ED-4DB2-BD59-A6C34878D82A}">
-                    <a16:rowId xmlns:a16="http://schemas.microsoft.com/office/drawing/2014/main" val="4045905126"/>
-                  </a:ext>
-                </a:extLst>
-              </a:tr>
-              <a:tr h="624271">
-                <a:tc>
-                  <a:txBody>
-                    <a:bodyPr/>
-                    <a:lstStyle/>
-                    <a:p>
-                      <a:pPr algn="ctr" fontAlgn="ctr"/>
-                      <a:r>
-                        <a:rPr lang="en-IN" sz="1000" u="none" strike="noStrike" dirty="0">
-                          <a:effectLst/>
-                        </a:rPr>
-                        <a:t>Admin hours saved</a:t>
-                      </a:r>
-                      <a:endParaRPr lang="en-IN" sz="1000" b="0" i="0" u="none" strike="noStrike" dirty="0">
-                        <a:solidFill>
-                          <a:srgbClr val="000000"/>
-                        </a:solidFill>
-                        <a:effectLst/>
-                        <a:latin typeface="Calibri" panose="020F0502020204030204" pitchFamily="34" charset="0"/>
-                      </a:endParaRPr>
-                    </a:p>
-                  </a:txBody>
-                  <a:tcPr marL="6503" marR="6503" marT="6503" marB="0" anchor="ctr"/>
-                </a:tc>
-                <a:tc>
-                  <a:txBody>
-                    <a:bodyPr/>
-                    <a:lstStyle/>
-                    <a:p>
-                      <a:pPr algn="ctr" fontAlgn="ctr"/>
-                      <a:r>
-                        <a:rPr lang="en-IN" sz="1000" u="none" strike="noStrike">
-                          <a:effectLst/>
-                        </a:rPr>
-                        <a:t>2,000+ hrs → ₹20–25 lakh</a:t>
-                      </a:r>
-                      <a:endParaRPr lang="en-IN" sz="1000" b="0" i="0" u="none" strike="noStrike">
-                        <a:solidFill>
-                          <a:srgbClr val="000000"/>
-                        </a:solidFill>
-                        <a:effectLst/>
-                        <a:latin typeface="Calibri" panose="020F0502020204030204" pitchFamily="34" charset="0"/>
-                      </a:endParaRPr>
-                    </a:p>
-                  </a:txBody>
-                  <a:tcPr marL="6503" marR="6503" marT="6503" marB="0" anchor="ctr"/>
-                </a:tc>
-                <a:extLst>
-                  <a:ext uri="{0D108BD9-81ED-4DB2-BD59-A6C34878D82A}">
-                    <a16:rowId xmlns:a16="http://schemas.microsoft.com/office/drawing/2014/main" val="3960675725"/>
-                  </a:ext>
-                </a:extLst>
-              </a:tr>
-              <a:tr h="936406">
-                <a:tc>
-                  <a:txBody>
-                    <a:bodyPr/>
-                    <a:lstStyle/>
-                    <a:p>
-                      <a:pPr algn="ctr" fontAlgn="ctr"/>
-                      <a:r>
-                        <a:rPr lang="en-IN" sz="1000" u="none" strike="noStrike" dirty="0">
-                          <a:effectLst/>
-                        </a:rPr>
-                        <a:t>Increased scheme utilization</a:t>
-                      </a:r>
-                      <a:endParaRPr lang="en-IN" sz="1000" b="0" i="0" u="none" strike="noStrike" dirty="0">
-                        <a:solidFill>
-                          <a:srgbClr val="000000"/>
-                        </a:solidFill>
-                        <a:effectLst/>
-                        <a:latin typeface="Calibri" panose="020F0502020204030204" pitchFamily="34" charset="0"/>
-                      </a:endParaRPr>
-                    </a:p>
-                  </a:txBody>
-                  <a:tcPr marL="6503" marR="6503" marT="6503" marB="0" anchor="ctr"/>
-                </a:tc>
-                <a:tc>
-                  <a:txBody>
-                    <a:bodyPr/>
-                    <a:lstStyle/>
-                    <a:p>
-                      <a:pPr algn="ctr" fontAlgn="ctr"/>
-                      <a:r>
-                        <a:rPr lang="en-US" sz="1000" u="none" strike="noStrike">
-                          <a:effectLst/>
-                        </a:rPr>
-                        <a:t>₹40–60 lakh worth of patient aid accessed</a:t>
-                      </a:r>
-                      <a:endParaRPr lang="en-US" sz="1000" b="0" i="0" u="none" strike="noStrike">
-                        <a:solidFill>
-                          <a:srgbClr val="000000"/>
-                        </a:solidFill>
-                        <a:effectLst/>
-                        <a:latin typeface="Calibri" panose="020F0502020204030204" pitchFamily="34" charset="0"/>
-                      </a:endParaRPr>
-                    </a:p>
-                  </a:txBody>
-                  <a:tcPr marL="6503" marR="6503" marT="6503" marB="0" anchor="ctr"/>
-                </a:tc>
-                <a:extLst>
-                  <a:ext uri="{0D108BD9-81ED-4DB2-BD59-A6C34878D82A}">
-                    <a16:rowId xmlns:a16="http://schemas.microsoft.com/office/drawing/2014/main" val="209397785"/>
-                  </a:ext>
-                </a:extLst>
-              </a:tr>
-              <a:tr h="936406">
-                <a:tc>
-                  <a:txBody>
-                    <a:bodyPr/>
-                    <a:lstStyle/>
-                    <a:p>
-                      <a:pPr algn="ctr" fontAlgn="ctr"/>
-                      <a:r>
-                        <a:rPr lang="en-IN" sz="1000" u="none" strike="noStrike" dirty="0">
-                          <a:effectLst/>
-                        </a:rPr>
-                        <a:t>Improved donor funding secured</a:t>
-                      </a:r>
-                      <a:endParaRPr lang="en-IN" sz="1000" b="0" i="0" u="none" strike="noStrike" dirty="0">
-                        <a:solidFill>
-                          <a:srgbClr val="000000"/>
-                        </a:solidFill>
-                        <a:effectLst/>
-                        <a:latin typeface="Calibri" panose="020F0502020204030204" pitchFamily="34" charset="0"/>
-                      </a:endParaRPr>
-                    </a:p>
-                  </a:txBody>
-                  <a:tcPr marL="6503" marR="6503" marT="6503" marB="0" anchor="ctr"/>
-                </a:tc>
-                <a:tc>
-                  <a:txBody>
-                    <a:bodyPr/>
-                    <a:lstStyle/>
-                    <a:p>
-                      <a:pPr algn="ctr" fontAlgn="ctr"/>
-                      <a:r>
-                        <a:rPr lang="en-US" sz="1000" u="none" strike="noStrike">
-                          <a:effectLst/>
-                        </a:rPr>
-                        <a:t>₹30–50 lakh through automated outreach</a:t>
-                      </a:r>
-                      <a:endParaRPr lang="en-US" sz="1000" b="0" i="0" u="none" strike="noStrike">
-                        <a:solidFill>
-                          <a:srgbClr val="000000"/>
-                        </a:solidFill>
-                        <a:effectLst/>
-                        <a:latin typeface="Calibri" panose="020F0502020204030204" pitchFamily="34" charset="0"/>
-                      </a:endParaRPr>
-                    </a:p>
-                  </a:txBody>
-                  <a:tcPr marL="6503" marR="6503" marT="6503" marB="0" anchor="ctr"/>
-                </a:tc>
-                <a:extLst>
-                  <a:ext uri="{0D108BD9-81ED-4DB2-BD59-A6C34878D82A}">
-                    <a16:rowId xmlns:a16="http://schemas.microsoft.com/office/drawing/2014/main" val="2225207138"/>
-                  </a:ext>
-                </a:extLst>
-              </a:tr>
-              <a:tr h="1092474">
-                <a:tc>
-                  <a:txBody>
-                    <a:bodyPr/>
-                    <a:lstStyle/>
-                    <a:p>
-                      <a:pPr algn="ctr" fontAlgn="ctr"/>
-                      <a:r>
-                        <a:rPr lang="en-US" sz="1000" u="none" strike="noStrike" dirty="0">
-                          <a:effectLst/>
-                        </a:rPr>
-                        <a:t>Cost to implement (Salesforce licenses + setup)</a:t>
-                      </a:r>
-                      <a:endParaRPr lang="en-US" sz="1000" b="0" i="0" u="none" strike="noStrike" dirty="0">
-                        <a:solidFill>
-                          <a:srgbClr val="000000"/>
-                        </a:solidFill>
-                        <a:effectLst/>
-                        <a:latin typeface="Calibri" panose="020F0502020204030204" pitchFamily="34" charset="0"/>
-                      </a:endParaRPr>
-                    </a:p>
-                  </a:txBody>
-                  <a:tcPr marL="6503" marR="6503" marT="6503" marB="0" anchor="ctr"/>
-                </a:tc>
-                <a:tc>
-                  <a:txBody>
-                    <a:bodyPr/>
-                    <a:lstStyle/>
-                    <a:p>
-                      <a:pPr algn="ctr" fontAlgn="ctr"/>
-                      <a:r>
-                        <a:rPr lang="en-IN" sz="1000" u="none" strike="noStrike">
-                          <a:effectLst/>
-                        </a:rPr>
-                        <a:t>₹25–35 lakh</a:t>
-                      </a:r>
-                      <a:endParaRPr lang="en-IN" sz="1000" b="0" i="0" u="none" strike="noStrike">
-                        <a:solidFill>
-                          <a:srgbClr val="000000"/>
-                        </a:solidFill>
-                        <a:effectLst/>
-                        <a:latin typeface="Calibri" panose="020F0502020204030204" pitchFamily="34" charset="0"/>
-                      </a:endParaRPr>
-                    </a:p>
-                  </a:txBody>
-                  <a:tcPr marL="6503" marR="6503" marT="6503" marB="0" anchor="ctr"/>
-                </a:tc>
-                <a:extLst>
-                  <a:ext uri="{0D108BD9-81ED-4DB2-BD59-A6C34878D82A}">
-                    <a16:rowId xmlns:a16="http://schemas.microsoft.com/office/drawing/2014/main" val="1247969337"/>
-                  </a:ext>
-                </a:extLst>
-              </a:tr>
-              <a:tr h="624271">
-                <a:tc>
-                  <a:txBody>
-                    <a:bodyPr/>
-                    <a:lstStyle/>
-                    <a:p>
-                      <a:pPr algn="ctr" fontAlgn="ctr"/>
-                      <a:r>
-                        <a:rPr lang="en-IN" sz="1000" b="1" u="none" strike="noStrike" dirty="0">
-                          <a:effectLst/>
-                        </a:rPr>
-                        <a:t>Net ROI (Year 1)</a:t>
-                      </a:r>
-                      <a:endParaRPr lang="en-IN" sz="1000" b="1" i="0" u="none" strike="noStrike" dirty="0">
-                        <a:solidFill>
-                          <a:srgbClr val="000000"/>
-                        </a:solidFill>
-                        <a:effectLst/>
-                        <a:latin typeface="Calibri" panose="020F0502020204030204" pitchFamily="34" charset="0"/>
-                      </a:endParaRPr>
-                    </a:p>
-                  </a:txBody>
-                  <a:tcPr marL="6503" marR="6503" marT="6503" marB="0" anchor="ctr"/>
-                </a:tc>
-                <a:tc>
-                  <a:txBody>
-                    <a:bodyPr/>
-                    <a:lstStyle/>
-                    <a:p>
-                      <a:pPr algn="ctr" fontAlgn="ctr"/>
-                      <a:r>
-                        <a:rPr lang="en-US" sz="1000" u="none" strike="noStrike" dirty="0">
-                          <a:effectLst/>
-                        </a:rPr>
-                        <a:t>₹60–100 lakh in value unlocked</a:t>
-                      </a:r>
-                      <a:endParaRPr lang="en-US" sz="1000" b="1" i="0" u="none" strike="noStrike" dirty="0">
-                        <a:solidFill>
-                          <a:srgbClr val="000000"/>
-                        </a:solidFill>
-                        <a:effectLst/>
-                        <a:latin typeface="Calibri" panose="020F0502020204030204" pitchFamily="34" charset="0"/>
-                      </a:endParaRPr>
-                    </a:p>
-                  </a:txBody>
-                  <a:tcPr marL="6503" marR="6503" marT="6503" marB="0" anchor="ctr"/>
-                </a:tc>
-                <a:extLst>
-                  <a:ext uri="{0D108BD9-81ED-4DB2-BD59-A6C34878D82A}">
-                    <a16:rowId xmlns:a16="http://schemas.microsoft.com/office/drawing/2014/main" val="730933312"/>
-                  </a:ext>
-                </a:extLst>
-              </a:tr>
-            </a:tbl>
-          </a:graphicData>
-        </a:graphic>
-      </p:graphicFrame>
-      <p:sp>
-        <p:nvSpPr>
-          <p:cNvPr id="10" name="TextBox 9">
-            <a:extLst>
-              <a:ext uri="{FF2B5EF4-FFF2-40B4-BE49-F238E27FC236}">
-                <a16:creationId xmlns:a16="http://schemas.microsoft.com/office/drawing/2014/main" id="{BBE2051A-617E-B725-F0E3-4CF9BF0C7EA4}"/>
-              </a:ext>
-            </a:extLst>
-          </p:cNvPr>
-          <p:cNvSpPr txBox="1"/>
-          <p:nvPr/>
-        </p:nvSpPr>
-        <p:spPr>
-          <a:xfrm>
-            <a:off x="6604001" y="5949349"/>
-            <a:ext cx="1913466" cy="338554"/>
-          </a:xfrm>
-          <a:prstGeom prst="rect">
-            <a:avLst/>
-          </a:prstGeom>
-          <a:noFill/>
-        </p:spPr>
-        <p:txBody>
-          <a:bodyPr wrap="square" rtlCol="0">
-            <a:spAutoFit/>
-          </a:bodyPr>
-          <a:lstStyle/>
-          <a:p>
-            <a:r>
-              <a:rPr lang="en-IN" sz="800" dirty="0"/>
-              <a:t>** Projected Estimates with rough calculations and </a:t>
-            </a:r>
-            <a:r>
-              <a:rPr lang="en-IN" sz="800" dirty="0" err="1"/>
-              <a:t>asumptions</a:t>
-            </a:r>
-            <a:endParaRPr lang="en-IN" sz="800" dirty="0"/>
-          </a:p>
-        </p:txBody>
-      </p:sp>
-    </p:spTree>
-    <p:extLst>
-      <p:ext uri="{BB962C8B-B14F-4D97-AF65-F5344CB8AC3E}">
-        <p14:creationId xmlns:p14="http://schemas.microsoft.com/office/powerpoint/2010/main" val="2367142842"/>
-      </p:ext>
-    </p:extLst>
-  </p:cSld>
-  <p:clrMapOvr>
-    <a:masterClrMapping/>
-  </p:clrMapOvr>
-</p:sld>
-</file>
-
-<file path=ppt/slides/slide2.xml><?xml version="1.0" encoding="utf-8"?>
-<p:sld xmlns:a="http://schemas.openxmlformats.org/drawingml/2006/main" xmlns:r="http://schemas.openxmlformats.org/officeDocument/2006/relationships" xmlns:p="http://schemas.openxmlformats.org/presentationml/2006/main">
-  <p:cSld>
-    <p:spTree>
-      <p:nvGrpSpPr>
-        <p:cNvPr id="1" name=""/>
-        <p:cNvGrpSpPr/>
-        <p:nvPr/>
-      </p:nvGrpSpPr>
-      <p:grpSpPr>
-        <a:xfrm>
-          <a:off x="0" y="0"/>
-          <a:ext cx="0" cy="0"/>
-          <a:chOff x="0" y="0"/>
-          <a:chExt cx="0" cy="0"/>
-        </a:xfrm>
-      </p:grpSpPr>
-      <p:sp>
-        <p:nvSpPr>
-          <p:cNvPr id="2" name="Title 1"/>
-          <p:cNvSpPr>
-            <a:spLocks noGrp="1"/>
-          </p:cNvSpPr>
-          <p:nvPr>
-            <p:ph type="title"/>
-          </p:nvPr>
-        </p:nvSpPr>
-        <p:spPr/>
-        <p:txBody>
-          <a:bodyPr/>
-          <a:lstStyle/>
-          <a:p>
-            <a:r>
-              <a:t>Problem Statement</a:t>
-            </a:r>
-          </a:p>
-        </p:txBody>
-      </p:sp>
-      <p:sp>
-        <p:nvSpPr>
-          <p:cNvPr id="3" name="Content Placeholder 2"/>
-          <p:cNvSpPr>
-            <a:spLocks noGrp="1"/>
-          </p:cNvSpPr>
-          <p:nvPr>
-            <p:ph idx="1"/>
-          </p:nvPr>
-        </p:nvSpPr>
-        <p:spPr/>
-        <p:txBody>
-          <a:bodyPr/>
-          <a:lstStyle/>
-          <a:p>
-            <a:r>
-              <a:t>Patients with critical illnesses often lack awareness of available financial aid.</a:t>
-            </a:r>
-          </a:p>
-          <a:p>
-            <a:r>
-              <a:t>Hospitals struggle to coordinate with NGOs, charities, and government schemes.</a:t>
-            </a:r>
-          </a:p>
-          <a:p>
-            <a:r>
-              <a:t>Manual tracking of schemes, donors, and patient eligibility is inefficient.</a:t>
-            </a:r>
-          </a:p>
-        </p:txBody>
-      </p:sp>
-    </p:spTree>
-  </p:cSld>
-  <p:clrMapOvr>
-    <a:masterClrMapping/>
-  </p:clrMapOvr>
-</p:sld>
-</file>
-
-<file path=ppt/slides/slide3.xml><?xml version="1.0" encoding="utf-8"?>
-<p:sld xmlns:a="http://schemas.openxmlformats.org/drawingml/2006/main" xmlns:r="http://schemas.openxmlformats.org/officeDocument/2006/relationships" xmlns:p="http://schemas.openxmlformats.org/presentationml/2006/main">
-  <p:cSld>
-    <p:spTree>
-      <p:nvGrpSpPr>
-        <p:cNvPr id="1" name=""/>
-        <p:cNvGrpSpPr/>
-        <p:nvPr/>
-      </p:nvGrpSpPr>
-      <p:grpSpPr>
-        <a:xfrm>
-          <a:off x="0" y="0"/>
-          <a:ext cx="0" cy="0"/>
-          <a:chOff x="0" y="0"/>
-          <a:chExt cx="0" cy="0"/>
-        </a:xfrm>
-      </p:grpSpPr>
-      <p:sp>
-        <p:nvSpPr>
-          <p:cNvPr id="2" name="Title 1"/>
-          <p:cNvSpPr>
-            <a:spLocks noGrp="1"/>
-          </p:cNvSpPr>
-          <p:nvPr>
-            <p:ph type="title"/>
-          </p:nvPr>
-        </p:nvSpPr>
-        <p:spPr/>
-        <p:txBody>
-          <a:bodyPr>
-            <a:normAutofit fontScale="90000"/>
-          </a:bodyPr>
-          <a:lstStyle/>
-          <a:p>
-            <a:r>
-              <a:t>Transforming Access to Aid with AgentForce</a:t>
-            </a:r>
-          </a:p>
-        </p:txBody>
-      </p:sp>
-      <p:sp>
-        <p:nvSpPr>
-          <p:cNvPr id="3" name="Content Placeholder 2"/>
-          <p:cNvSpPr>
-            <a:spLocks noGrp="1"/>
-          </p:cNvSpPr>
-          <p:nvPr>
-            <p:ph idx="1"/>
-          </p:nvPr>
-        </p:nvSpPr>
-        <p:spPr/>
-        <p:txBody>
-          <a:bodyPr/>
-          <a:lstStyle/>
-          <a:p>
-            <a:r>
-              <a:rPr dirty="0"/>
-              <a:t>Empower patients to discover funding support using AI-powered assistance.</a:t>
-            </a:r>
-          </a:p>
-          <a:p>
-            <a:r>
-              <a:rPr dirty="0"/>
-              <a:t>Enable hospital administrators to manage partnerships and eligibility data efficiently.</a:t>
-            </a:r>
-          </a:p>
-          <a:p>
-            <a:r>
-              <a:rPr dirty="0"/>
-              <a:t>Automate donor communications and </a:t>
-            </a:r>
-            <a:r>
-              <a:rPr lang="en-IN" dirty="0"/>
-              <a:t>patient </a:t>
-            </a:r>
-            <a:r>
-              <a:rPr dirty="0"/>
-              <a:t>case matching.</a:t>
-            </a:r>
-          </a:p>
-        </p:txBody>
-      </p:sp>
-    </p:spTree>
-  </p:cSld>
-  <p:clrMapOvr>
-    <a:masterClrMapping/>
-  </p:clrMapOvr>
-</p:sld>
-</file>
-
-<file path=ppt/slides/slide4.xml><?xml version="1.0" encoding="utf-8"?>
-<p:sld xmlns:a="http://schemas.openxmlformats.org/drawingml/2006/main" xmlns:r="http://schemas.openxmlformats.org/officeDocument/2006/relationships" xmlns:p="http://schemas.openxmlformats.org/presentationml/2006/main">
-  <p:cSld>
-    <p:spTree>
-      <p:nvGrpSpPr>
-        <p:cNvPr id="1" name=""/>
-        <p:cNvGrpSpPr/>
-        <p:nvPr/>
-      </p:nvGrpSpPr>
-      <p:grpSpPr>
-        <a:xfrm>
-          <a:off x="0" y="0"/>
-          <a:ext cx="0" cy="0"/>
-          <a:chOff x="0" y="0"/>
-          <a:chExt cx="0" cy="0"/>
-        </a:xfrm>
-      </p:grpSpPr>
-      <p:sp>
-        <p:nvSpPr>
-          <p:cNvPr id="2" name="Title 1"/>
-          <p:cNvSpPr>
-            <a:spLocks noGrp="1"/>
-          </p:cNvSpPr>
-          <p:nvPr>
-            <p:ph type="title"/>
-          </p:nvPr>
-        </p:nvSpPr>
-        <p:spPr/>
-        <p:txBody>
-          <a:bodyPr/>
-          <a:lstStyle/>
-          <a:p>
-            <a:r>
-              <a:t>Stakeholders</a:t>
-            </a:r>
-          </a:p>
-        </p:txBody>
-      </p:sp>
-      <p:sp>
-        <p:nvSpPr>
-          <p:cNvPr id="3" name="Content Placeholder 2"/>
-          <p:cNvSpPr>
-            <a:spLocks noGrp="1"/>
-          </p:cNvSpPr>
-          <p:nvPr>
-            <p:ph idx="1"/>
-          </p:nvPr>
-        </p:nvSpPr>
-        <p:spPr/>
-        <p:txBody>
-          <a:bodyPr/>
-          <a:lstStyle/>
-          <a:p>
-            <a:r>
-              <a:rPr dirty="0"/>
-              <a:t>Patient: Seeks financial aid → Discover relevant schemes, apply easily.</a:t>
-            </a:r>
-          </a:p>
-          <a:p>
-            <a:r>
-              <a:rPr dirty="0"/>
-              <a:t>Hospital Admin: Coordinates aid → Track, onboard partners, manage cases.</a:t>
-            </a:r>
-          </a:p>
-          <a:p>
-            <a:r>
-              <a:rPr dirty="0"/>
-              <a:t>NGO/Donor: Provides funding → Get matched with genuine needs.</a:t>
-            </a:r>
-          </a:p>
-        </p:txBody>
-      </p:sp>
-    </p:spTree>
-  </p:cSld>
-  <p:clrMapOvr>
-    <a:masterClrMapping/>
-  </p:clrMapOvr>
-</p:sld>
-</file>
-
-<file path=ppt/slides/slide5.xml><?xml version="1.0" encoding="utf-8"?>
-<p:sld xmlns:a="http://schemas.openxmlformats.org/drawingml/2006/main" xmlns:r="http://schemas.openxmlformats.org/officeDocument/2006/relationships" xmlns:p="http://schemas.openxmlformats.org/presentationml/2006/main">
-  <p:cSld>
-    <p:spTree>
-      <p:nvGrpSpPr>
-        <p:cNvPr id="1" name=""/>
-        <p:cNvGrpSpPr/>
-        <p:nvPr/>
-      </p:nvGrpSpPr>
-      <p:grpSpPr>
-        <a:xfrm>
-          <a:off x="0" y="0"/>
-          <a:ext cx="0" cy="0"/>
-          <a:chOff x="0" y="0"/>
-          <a:chExt cx="0" cy="0"/>
-        </a:xfrm>
-      </p:grpSpPr>
-      <p:sp>
-        <p:nvSpPr>
-          <p:cNvPr id="2" name="Title 1"/>
-          <p:cNvSpPr>
-            <a:spLocks noGrp="1"/>
-          </p:cNvSpPr>
-          <p:nvPr>
-            <p:ph type="title"/>
-          </p:nvPr>
-        </p:nvSpPr>
-        <p:spPr/>
-        <p:txBody>
-          <a:bodyPr/>
-          <a:lstStyle/>
-          <a:p>
-            <a:r>
-              <a:t>AgentForce Use Case Scenarios</a:t>
-            </a:r>
-          </a:p>
-        </p:txBody>
-      </p:sp>
-      <p:sp>
-        <p:nvSpPr>
-          <p:cNvPr id="3" name="Content Placeholder 2"/>
-          <p:cNvSpPr>
-            <a:spLocks noGrp="1"/>
-          </p:cNvSpPr>
-          <p:nvPr>
-            <p:ph idx="1"/>
-          </p:nvPr>
-        </p:nvSpPr>
-        <p:spPr/>
-        <p:txBody>
-          <a:bodyPr/>
-          <a:lstStyle/>
-          <a:p>
-            <a:r>
-              <a:rPr dirty="0"/>
-              <a:t>Patients: Search for government/NGO funding based on diagnosis.</a:t>
-            </a:r>
-          </a:p>
-          <a:p>
-            <a:r>
-              <a:rPr dirty="0"/>
-              <a:t>Administrators: Track all schemes, manage donor data, onboard NGOs.</a:t>
-            </a:r>
-          </a:p>
-          <a:p>
-            <a:r>
-              <a:rPr dirty="0"/>
-              <a:t>Donors: Receive alerts for eligible patients based on funding preferences.</a:t>
-            </a:r>
-          </a:p>
-        </p:txBody>
-      </p:sp>
-    </p:spTree>
-  </p:cSld>
-  <p:clrMapOvr>
-    <a:masterClrMapping/>
-  </p:clrMapOvr>
-</p:sld>
-</file>
-
-<file path=ppt/slides/slide6.xml><?xml version="1.0" encoding="utf-8"?>
-<p:sld xmlns:a="http://schemas.openxmlformats.org/drawingml/2006/main" xmlns:r="http://schemas.openxmlformats.org/officeDocument/2006/relationships" xmlns:p="http://schemas.openxmlformats.org/presentationml/2006/main">
-  <p:cSld>
-    <p:spTree>
-      <p:nvGrpSpPr>
-        <p:cNvPr id="1" name=""/>
-        <p:cNvGrpSpPr/>
-        <p:nvPr/>
-      </p:nvGrpSpPr>
-      <p:grpSpPr>
-        <a:xfrm>
-          <a:off x="0" y="0"/>
-          <a:ext cx="0" cy="0"/>
-          <a:chOff x="0" y="0"/>
-          <a:chExt cx="0" cy="0"/>
-        </a:xfrm>
-      </p:grpSpPr>
-      <p:sp>
-        <p:nvSpPr>
-          <p:cNvPr id="2" name="Title 1"/>
-          <p:cNvSpPr>
-            <a:spLocks noGrp="1"/>
-          </p:cNvSpPr>
-          <p:nvPr>
-            <p:ph type="title"/>
-          </p:nvPr>
-        </p:nvSpPr>
-        <p:spPr/>
-        <p:txBody>
-          <a:bodyPr>
-            <a:normAutofit fontScale="90000"/>
-          </a:bodyPr>
-          <a:lstStyle/>
-          <a:p>
-            <a:r>
-              <a:t>Salesforce-Powered Support Ecosystem</a:t>
-            </a:r>
-          </a:p>
-        </p:txBody>
-      </p:sp>
-      <p:sp>
-        <p:nvSpPr>
-          <p:cNvPr id="3" name="Content Placeholder 2"/>
-          <p:cNvSpPr>
-            <a:spLocks noGrp="1"/>
-          </p:cNvSpPr>
-          <p:nvPr>
-            <p:ph idx="1"/>
-          </p:nvPr>
-        </p:nvSpPr>
-        <p:spPr/>
-        <p:txBody>
-          <a:bodyPr/>
-          <a:lstStyle/>
-          <a:p>
-            <a:r>
-              <a:rPr dirty="0"/>
-              <a:t>Agent Interface (Patient/Admin)</a:t>
-            </a:r>
-          </a:p>
-          <a:p>
-            <a:r>
-              <a:rPr dirty="0"/>
-              <a:t>Salesforce Data Cloud (Schemes, Donors, NGOs)</a:t>
-            </a:r>
-            <a:r>
-              <a:rPr lang="en-IN" dirty="0"/>
-              <a:t> **</a:t>
-            </a:r>
-            <a:endParaRPr dirty="0"/>
-          </a:p>
-          <a:p>
-            <a:r>
-              <a:rPr dirty="0"/>
-              <a:t>Flows &amp; Rules Engine</a:t>
-            </a:r>
-          </a:p>
-          <a:p>
-            <a:r>
-              <a:rPr dirty="0"/>
-              <a:t>Email/Notification System</a:t>
-            </a:r>
-          </a:p>
-          <a:p>
-            <a:r>
-              <a:rPr dirty="0"/>
-              <a:t>Integration APIs for scheme databases</a:t>
-            </a:r>
-          </a:p>
-        </p:txBody>
-      </p:sp>
-      <p:sp>
-        <p:nvSpPr>
-          <p:cNvPr id="4" name="TextBox 3">
-            <a:extLst>
-              <a:ext uri="{FF2B5EF4-FFF2-40B4-BE49-F238E27FC236}">
-                <a16:creationId xmlns:a16="http://schemas.microsoft.com/office/drawing/2014/main" id="{29913253-B443-65E1-53D3-33668FBBF268}"/>
-              </a:ext>
-            </a:extLst>
-          </p:cNvPr>
-          <p:cNvSpPr txBox="1"/>
-          <p:nvPr/>
-        </p:nvSpPr>
-        <p:spPr>
-          <a:xfrm>
-            <a:off x="6731001" y="6135669"/>
-            <a:ext cx="1913466" cy="338554"/>
-          </a:xfrm>
-          <a:prstGeom prst="rect">
-            <a:avLst/>
-          </a:prstGeom>
-          <a:noFill/>
-        </p:spPr>
-        <p:txBody>
-          <a:bodyPr wrap="square" rtlCol="0">
-            <a:spAutoFit/>
-          </a:bodyPr>
-          <a:lstStyle/>
-          <a:p>
-            <a:r>
-              <a:rPr lang="en-IN" sz="800" dirty="0"/>
-              <a:t>** Currently not implemented in hackathon use case</a:t>
-            </a:r>
-          </a:p>
-        </p:txBody>
-      </p:sp>
-    </p:spTree>
-  </p:cSld>
-  <p:clrMapOvr>
-    <a:masterClrMapping/>
-  </p:clrMapOvr>
-</p:sld>
-</file>
-
-<file path=ppt/slides/slide7.xml><?xml version="1.0" encoding="utf-8"?>
-<p:sld xmlns:a="http://schemas.openxmlformats.org/drawingml/2006/main" xmlns:r="http://schemas.openxmlformats.org/officeDocument/2006/relationships" xmlns:p="http://schemas.openxmlformats.org/presentationml/2006/main">
-  <p:cSld>
-    <p:spTree>
-      <p:nvGrpSpPr>
-        <p:cNvPr id="1" name=""/>
-        <p:cNvGrpSpPr/>
-        <p:nvPr/>
-      </p:nvGrpSpPr>
-      <p:grpSpPr>
-        <a:xfrm>
-          <a:off x="0" y="0"/>
-          <a:ext cx="0" cy="0"/>
-          <a:chOff x="0" y="0"/>
-          <a:chExt cx="0" cy="0"/>
-        </a:xfrm>
-      </p:grpSpPr>
-      <p:sp>
-        <p:nvSpPr>
-          <p:cNvPr id="2" name="Title 1"/>
-          <p:cNvSpPr>
-            <a:spLocks noGrp="1"/>
-          </p:cNvSpPr>
-          <p:nvPr>
-            <p:ph type="title"/>
-          </p:nvPr>
-        </p:nvSpPr>
-        <p:spPr/>
-        <p:txBody>
-          <a:bodyPr/>
-          <a:lstStyle/>
-          <a:p>
-            <a:r>
-              <a:t>Value Delivered</a:t>
-            </a:r>
-          </a:p>
-        </p:txBody>
-      </p:sp>
-      <p:sp>
-        <p:nvSpPr>
-          <p:cNvPr id="3" name="Content Placeholder 2"/>
-          <p:cNvSpPr>
-            <a:spLocks noGrp="1"/>
-          </p:cNvSpPr>
-          <p:nvPr>
-            <p:ph idx="1"/>
-          </p:nvPr>
-        </p:nvSpPr>
-        <p:spPr/>
-        <p:txBody>
-          <a:bodyPr/>
-          <a:lstStyle/>
-          <a:p>
-            <a:r>
-              <a:rPr dirty="0"/>
-              <a:t>Improved patient access to financial aid.</a:t>
-            </a:r>
-          </a:p>
-          <a:p>
-            <a:r>
-              <a:rPr dirty="0"/>
-              <a:t>Reduced admin workload and manual tracking.</a:t>
-            </a:r>
-          </a:p>
-          <a:p>
-            <a:r>
-              <a:rPr dirty="0"/>
-              <a:t>Stronger partnerships with NGOs/charities.</a:t>
-            </a:r>
-          </a:p>
-          <a:p>
-            <a:r>
-              <a:rPr dirty="0"/>
-              <a:t>Personalized and timely donor engagement.</a:t>
-            </a:r>
-          </a:p>
-        </p:txBody>
-      </p:sp>
-    </p:spTree>
-  </p:cSld>
-  <p:clrMapOvr>
-    <a:masterClrMapping/>
-  </p:clrMapOvr>
-</p:sld>
-</file>
-
-<file path=ppt/slides/slide8.xml><?xml version="1.0" encoding="utf-8"?>
-<p:sld xmlns:a="http://schemas.openxmlformats.org/drawingml/2006/main" xmlns:r="http://schemas.openxmlformats.org/officeDocument/2006/relationships" xmlns:p="http://schemas.openxmlformats.org/presentationml/2006/main">
-  <p:cSld>
-    <p:spTree>
-      <p:nvGrpSpPr>
-        <p:cNvPr id="1" name=""/>
-        <p:cNvGrpSpPr/>
-        <p:nvPr/>
-      </p:nvGrpSpPr>
-      <p:grpSpPr>
-        <a:xfrm>
-          <a:off x="0" y="0"/>
-          <a:ext cx="0" cy="0"/>
-          <a:chOff x="0" y="0"/>
-          <a:chExt cx="0" cy="0"/>
-        </a:xfrm>
-      </p:grpSpPr>
-      <p:sp>
-        <p:nvSpPr>
-          <p:cNvPr id="2" name="Title 1"/>
-          <p:cNvSpPr>
-            <a:spLocks noGrp="1"/>
-          </p:cNvSpPr>
-          <p:nvPr>
-            <p:ph type="title"/>
-          </p:nvPr>
-        </p:nvSpPr>
-        <p:spPr/>
-        <p:txBody>
-          <a:bodyPr/>
-          <a:lstStyle/>
-          <a:p>
-            <a:r>
-              <a:t>Implementation Roadmap</a:t>
-            </a:r>
-          </a:p>
-        </p:txBody>
-      </p:sp>
-      <p:sp>
-        <p:nvSpPr>
-          <p:cNvPr id="3" name="Content Placeholder 2"/>
-          <p:cNvSpPr>
-            <a:spLocks noGrp="1"/>
-          </p:cNvSpPr>
-          <p:nvPr>
-            <p:ph idx="1"/>
-          </p:nvPr>
-        </p:nvSpPr>
-        <p:spPr/>
-        <p:txBody>
-          <a:bodyPr/>
-          <a:lstStyle/>
-          <a:p>
-            <a:r>
-              <a:rPr dirty="0"/>
-              <a:t>Phase 1: MVP with patient discovery and scheme tracking.</a:t>
-            </a:r>
-          </a:p>
-          <a:p>
-            <a:r>
-              <a:rPr dirty="0"/>
-              <a:t>Phase 2: Admin tools for onboarding NGOs and donors.</a:t>
-            </a:r>
-          </a:p>
-          <a:p>
-            <a:r>
-              <a:rPr dirty="0"/>
-              <a:t>Phase 3: Automated matching and communication flows.</a:t>
-            </a:r>
-          </a:p>
-          <a:p>
-            <a:r>
-              <a:rPr dirty="0"/>
-              <a:t>Pilot launch with selected hospitals and charities.</a:t>
-            </a:r>
-          </a:p>
-        </p:txBody>
-      </p:sp>
-    </p:spTree>
-  </p:cSld>
-  <p:clrMapOvr>
-    <a:masterClrMapping/>
-  </p:clrMapOvr>
-</p:sld>
-</file>
-
-<file path=ppt/slides/slide9.xml><?xml version="1.0" encoding="utf-8"?>
 <p:sld xmlns:a="http://schemas.openxmlformats.org/drawingml/2006/main" xmlns:r="http://schemas.openxmlformats.org/officeDocument/2006/relationships" xmlns:p="http://schemas.openxmlformats.org/presentationml/2006/main">
   <p:cSld>
     <p:spTree>
@@ -15635,6 +14520,1402 @@
 </p:sld>
 </file>
 
+<file path=ppt/slides/slide11.xml><?xml version="1.0" encoding="utf-8"?>
+<p:sld xmlns:a="http://schemas.openxmlformats.org/drawingml/2006/main" xmlns:r="http://schemas.openxmlformats.org/officeDocument/2006/relationships" xmlns:p="http://schemas.openxmlformats.org/presentationml/2006/main">
+  <p:cSld>
+    <p:spTree>
+      <p:nvGrpSpPr>
+        <p:cNvPr id="1" name="">
+          <a:extLst>
+            <a:ext uri="{FF2B5EF4-FFF2-40B4-BE49-F238E27FC236}">
+              <a16:creationId xmlns:a16="http://schemas.microsoft.com/office/drawing/2014/main" id="{F4495289-D7BE-52FA-DA74-777E8777CB92}"/>
+            </a:ext>
+          </a:extLst>
+        </p:cNvPr>
+        <p:cNvGrpSpPr/>
+        <p:nvPr/>
+      </p:nvGrpSpPr>
+      <p:grpSpPr>
+        <a:xfrm>
+          <a:off x="0" y="0"/>
+          <a:ext cx="0" cy="0"/>
+          <a:chOff x="0" y="0"/>
+          <a:chExt cx="0" cy="0"/>
+        </a:xfrm>
+      </p:grpSpPr>
+      <p:sp>
+        <p:nvSpPr>
+          <p:cNvPr id="8" name="TextBox 7">
+            <a:extLst>
+              <a:ext uri="{FF2B5EF4-FFF2-40B4-BE49-F238E27FC236}">
+                <a16:creationId xmlns:a16="http://schemas.microsoft.com/office/drawing/2014/main" id="{E280C347-5837-461B-28C1-276D77990518}"/>
+              </a:ext>
+            </a:extLst>
+          </p:cNvPr>
+          <p:cNvSpPr txBox="1"/>
+          <p:nvPr/>
+        </p:nvSpPr>
+        <p:spPr>
+          <a:xfrm>
+            <a:off x="452966" y="598945"/>
+            <a:ext cx="8238067" cy="369332"/>
+          </a:xfrm>
+          <a:prstGeom prst="rect">
+            <a:avLst/>
+          </a:prstGeom>
+          <a:noFill/>
+        </p:spPr>
+        <p:txBody>
+          <a:bodyPr wrap="square" rtlCol="0">
+            <a:spAutoFit/>
+          </a:bodyPr>
+          <a:lstStyle/>
+          <a:p>
+            <a:r>
+              <a:rPr lang="en-IN" dirty="0">
+                <a:solidFill>
+                  <a:schemeClr val="bg1"/>
+                </a:solidFill>
+              </a:rPr>
+              <a:t>Example ROI Estimate over 12 months ** ( for a 500-bed Hospital )</a:t>
+            </a:r>
+          </a:p>
+        </p:txBody>
+      </p:sp>
+      <p:graphicFrame>
+        <p:nvGraphicFramePr>
+          <p:cNvPr id="9" name="Table 8">
+            <a:extLst>
+              <a:ext uri="{FF2B5EF4-FFF2-40B4-BE49-F238E27FC236}">
+                <a16:creationId xmlns:a16="http://schemas.microsoft.com/office/drawing/2014/main" id="{0EE202C8-C84C-BA15-A7D9-2BF440C5B574}"/>
+              </a:ext>
+            </a:extLst>
+          </p:cNvPr>
+          <p:cNvGraphicFramePr>
+            <a:graphicFrameLocks noGrp="1"/>
+          </p:cNvGraphicFramePr>
+          <p:nvPr>
+            <p:extLst>
+              <p:ext uri="{D42A27DB-BD31-4B8C-83A1-F6EECF244321}">
+                <p14:modId xmlns:p14="http://schemas.microsoft.com/office/powerpoint/2010/main" val="3106959707"/>
+              </p:ext>
+            </p:extLst>
+          </p:nvPr>
+        </p:nvGraphicFramePr>
+        <p:xfrm>
+          <a:off x="549931" y="1287821"/>
+          <a:ext cx="7806670" cy="4525963"/>
+        </p:xfrm>
+        <a:graphic>
+          <a:graphicData uri="http://schemas.openxmlformats.org/drawingml/2006/table">
+            <a:tbl>
+              <a:tblPr>
+                <a:tableStyleId>{5C22544A-7EE6-4342-B048-85BDC9FD1C3A}</a:tableStyleId>
+              </a:tblPr>
+              <a:tblGrid>
+                <a:gridCol w="3809841">
+                  <a:extLst>
+                    <a:ext uri="{9D8B030D-6E8A-4147-A177-3AD203B41FA5}">
+                      <a16:colId xmlns:a16="http://schemas.microsoft.com/office/drawing/2014/main" val="1300301816"/>
+                    </a:ext>
+                  </a:extLst>
+                </a:gridCol>
+                <a:gridCol w="3996829">
+                  <a:extLst>
+                    <a:ext uri="{9D8B030D-6E8A-4147-A177-3AD203B41FA5}">
+                      <a16:colId xmlns:a16="http://schemas.microsoft.com/office/drawing/2014/main" val="816146043"/>
+                    </a:ext>
+                  </a:extLst>
+                </a:gridCol>
+              </a:tblGrid>
+              <a:tr h="312135">
+                <a:tc>
+                  <a:txBody>
+                    <a:bodyPr/>
+                    <a:lstStyle/>
+                    <a:p>
+                      <a:pPr algn="ctr" fontAlgn="ctr"/>
+                      <a:r>
+                        <a:rPr lang="en-IN" sz="900" b="1" u="none" strike="noStrike">
+                          <a:effectLst/>
+                        </a:rPr>
+                        <a:t>Metric</a:t>
+                      </a:r>
+                      <a:endParaRPr lang="en-IN" sz="900" b="1" i="0" u="none" strike="noStrike">
+                        <a:solidFill>
+                          <a:srgbClr val="000000"/>
+                        </a:solidFill>
+                        <a:effectLst/>
+                        <a:latin typeface="Calibri" panose="020F0502020204030204" pitchFamily="34" charset="0"/>
+                      </a:endParaRPr>
+                    </a:p>
+                  </a:txBody>
+                  <a:tcPr marL="6503" marR="6503" marT="6503" marB="0" anchor="ctr"/>
+                </a:tc>
+                <a:tc>
+                  <a:txBody>
+                    <a:bodyPr/>
+                    <a:lstStyle/>
+                    <a:p>
+                      <a:pPr algn="ctr" fontAlgn="ctr"/>
+                      <a:r>
+                        <a:rPr lang="en-IN" sz="900" b="1" u="none" strike="noStrike" dirty="0">
+                          <a:effectLst/>
+                        </a:rPr>
+                        <a:t>Estimated Value</a:t>
+                      </a:r>
+                      <a:endParaRPr lang="en-IN" sz="900" b="1" i="0" u="none" strike="noStrike" dirty="0">
+                        <a:solidFill>
+                          <a:srgbClr val="000000"/>
+                        </a:solidFill>
+                        <a:effectLst/>
+                        <a:latin typeface="Calibri" panose="020F0502020204030204" pitchFamily="34" charset="0"/>
+                      </a:endParaRPr>
+                    </a:p>
+                  </a:txBody>
+                  <a:tcPr marL="6503" marR="6503" marT="6503" marB="0" anchor="ctr"/>
+                </a:tc>
+                <a:extLst>
+                  <a:ext uri="{0D108BD9-81ED-4DB2-BD59-A6C34878D82A}">
+                    <a16:rowId xmlns:a16="http://schemas.microsoft.com/office/drawing/2014/main" val="4045905126"/>
+                  </a:ext>
+                </a:extLst>
+              </a:tr>
+              <a:tr h="624271">
+                <a:tc>
+                  <a:txBody>
+                    <a:bodyPr/>
+                    <a:lstStyle/>
+                    <a:p>
+                      <a:pPr algn="ctr" fontAlgn="ctr"/>
+                      <a:r>
+                        <a:rPr lang="en-IN" sz="1000" u="none" strike="noStrike" dirty="0">
+                          <a:effectLst/>
+                        </a:rPr>
+                        <a:t>Admin hours saved</a:t>
+                      </a:r>
+                      <a:endParaRPr lang="en-IN" sz="1000" b="0" i="0" u="none" strike="noStrike" dirty="0">
+                        <a:solidFill>
+                          <a:srgbClr val="000000"/>
+                        </a:solidFill>
+                        <a:effectLst/>
+                        <a:latin typeface="Calibri" panose="020F0502020204030204" pitchFamily="34" charset="0"/>
+                      </a:endParaRPr>
+                    </a:p>
+                  </a:txBody>
+                  <a:tcPr marL="6503" marR="6503" marT="6503" marB="0" anchor="ctr"/>
+                </a:tc>
+                <a:tc>
+                  <a:txBody>
+                    <a:bodyPr/>
+                    <a:lstStyle/>
+                    <a:p>
+                      <a:pPr algn="ctr" fontAlgn="ctr"/>
+                      <a:r>
+                        <a:rPr lang="en-IN" sz="1000" u="none" strike="noStrike">
+                          <a:effectLst/>
+                        </a:rPr>
+                        <a:t>2,000+ hrs → ₹20–25 lakh</a:t>
+                      </a:r>
+                      <a:endParaRPr lang="en-IN" sz="1000" b="0" i="0" u="none" strike="noStrike">
+                        <a:solidFill>
+                          <a:srgbClr val="000000"/>
+                        </a:solidFill>
+                        <a:effectLst/>
+                        <a:latin typeface="Calibri" panose="020F0502020204030204" pitchFamily="34" charset="0"/>
+                      </a:endParaRPr>
+                    </a:p>
+                  </a:txBody>
+                  <a:tcPr marL="6503" marR="6503" marT="6503" marB="0" anchor="ctr"/>
+                </a:tc>
+                <a:extLst>
+                  <a:ext uri="{0D108BD9-81ED-4DB2-BD59-A6C34878D82A}">
+                    <a16:rowId xmlns:a16="http://schemas.microsoft.com/office/drawing/2014/main" val="3960675725"/>
+                  </a:ext>
+                </a:extLst>
+              </a:tr>
+              <a:tr h="936406">
+                <a:tc>
+                  <a:txBody>
+                    <a:bodyPr/>
+                    <a:lstStyle/>
+                    <a:p>
+                      <a:pPr algn="ctr" fontAlgn="ctr"/>
+                      <a:r>
+                        <a:rPr lang="en-IN" sz="1000" u="none" strike="noStrike" dirty="0">
+                          <a:effectLst/>
+                        </a:rPr>
+                        <a:t>Increased scheme utilization</a:t>
+                      </a:r>
+                      <a:endParaRPr lang="en-IN" sz="1000" b="0" i="0" u="none" strike="noStrike" dirty="0">
+                        <a:solidFill>
+                          <a:srgbClr val="000000"/>
+                        </a:solidFill>
+                        <a:effectLst/>
+                        <a:latin typeface="Calibri" panose="020F0502020204030204" pitchFamily="34" charset="0"/>
+                      </a:endParaRPr>
+                    </a:p>
+                  </a:txBody>
+                  <a:tcPr marL="6503" marR="6503" marT="6503" marB="0" anchor="ctr"/>
+                </a:tc>
+                <a:tc>
+                  <a:txBody>
+                    <a:bodyPr/>
+                    <a:lstStyle/>
+                    <a:p>
+                      <a:pPr algn="ctr" fontAlgn="ctr"/>
+                      <a:r>
+                        <a:rPr lang="en-US" sz="1000" u="none" strike="noStrike">
+                          <a:effectLst/>
+                        </a:rPr>
+                        <a:t>₹40–60 lakh worth of patient aid accessed</a:t>
+                      </a:r>
+                      <a:endParaRPr lang="en-US" sz="1000" b="0" i="0" u="none" strike="noStrike">
+                        <a:solidFill>
+                          <a:srgbClr val="000000"/>
+                        </a:solidFill>
+                        <a:effectLst/>
+                        <a:latin typeface="Calibri" panose="020F0502020204030204" pitchFamily="34" charset="0"/>
+                      </a:endParaRPr>
+                    </a:p>
+                  </a:txBody>
+                  <a:tcPr marL="6503" marR="6503" marT="6503" marB="0" anchor="ctr"/>
+                </a:tc>
+                <a:extLst>
+                  <a:ext uri="{0D108BD9-81ED-4DB2-BD59-A6C34878D82A}">
+                    <a16:rowId xmlns:a16="http://schemas.microsoft.com/office/drawing/2014/main" val="209397785"/>
+                  </a:ext>
+                </a:extLst>
+              </a:tr>
+              <a:tr h="936406">
+                <a:tc>
+                  <a:txBody>
+                    <a:bodyPr/>
+                    <a:lstStyle/>
+                    <a:p>
+                      <a:pPr algn="ctr" fontAlgn="ctr"/>
+                      <a:r>
+                        <a:rPr lang="en-IN" sz="1000" u="none" strike="noStrike" dirty="0">
+                          <a:effectLst/>
+                        </a:rPr>
+                        <a:t>Improved donor funding secured</a:t>
+                      </a:r>
+                      <a:endParaRPr lang="en-IN" sz="1000" b="0" i="0" u="none" strike="noStrike" dirty="0">
+                        <a:solidFill>
+                          <a:srgbClr val="000000"/>
+                        </a:solidFill>
+                        <a:effectLst/>
+                        <a:latin typeface="Calibri" panose="020F0502020204030204" pitchFamily="34" charset="0"/>
+                      </a:endParaRPr>
+                    </a:p>
+                  </a:txBody>
+                  <a:tcPr marL="6503" marR="6503" marT="6503" marB="0" anchor="ctr"/>
+                </a:tc>
+                <a:tc>
+                  <a:txBody>
+                    <a:bodyPr/>
+                    <a:lstStyle/>
+                    <a:p>
+                      <a:pPr algn="ctr" fontAlgn="ctr"/>
+                      <a:r>
+                        <a:rPr lang="en-US" sz="1000" u="none" strike="noStrike">
+                          <a:effectLst/>
+                        </a:rPr>
+                        <a:t>₹30–50 lakh through automated outreach</a:t>
+                      </a:r>
+                      <a:endParaRPr lang="en-US" sz="1000" b="0" i="0" u="none" strike="noStrike">
+                        <a:solidFill>
+                          <a:srgbClr val="000000"/>
+                        </a:solidFill>
+                        <a:effectLst/>
+                        <a:latin typeface="Calibri" panose="020F0502020204030204" pitchFamily="34" charset="0"/>
+                      </a:endParaRPr>
+                    </a:p>
+                  </a:txBody>
+                  <a:tcPr marL="6503" marR="6503" marT="6503" marB="0" anchor="ctr"/>
+                </a:tc>
+                <a:extLst>
+                  <a:ext uri="{0D108BD9-81ED-4DB2-BD59-A6C34878D82A}">
+                    <a16:rowId xmlns:a16="http://schemas.microsoft.com/office/drawing/2014/main" val="2225207138"/>
+                  </a:ext>
+                </a:extLst>
+              </a:tr>
+              <a:tr h="1092474">
+                <a:tc>
+                  <a:txBody>
+                    <a:bodyPr/>
+                    <a:lstStyle/>
+                    <a:p>
+                      <a:pPr algn="ctr" fontAlgn="ctr"/>
+                      <a:r>
+                        <a:rPr lang="en-US" sz="1000" u="none" strike="noStrike" dirty="0">
+                          <a:effectLst/>
+                        </a:rPr>
+                        <a:t>Cost to implement (Salesforce licenses + setup)</a:t>
+                      </a:r>
+                      <a:endParaRPr lang="en-US" sz="1000" b="0" i="0" u="none" strike="noStrike" dirty="0">
+                        <a:solidFill>
+                          <a:srgbClr val="000000"/>
+                        </a:solidFill>
+                        <a:effectLst/>
+                        <a:latin typeface="Calibri" panose="020F0502020204030204" pitchFamily="34" charset="0"/>
+                      </a:endParaRPr>
+                    </a:p>
+                  </a:txBody>
+                  <a:tcPr marL="6503" marR="6503" marT="6503" marB="0" anchor="ctr"/>
+                </a:tc>
+                <a:tc>
+                  <a:txBody>
+                    <a:bodyPr/>
+                    <a:lstStyle/>
+                    <a:p>
+                      <a:pPr algn="ctr" fontAlgn="ctr"/>
+                      <a:r>
+                        <a:rPr lang="en-IN" sz="1000" u="none" strike="noStrike">
+                          <a:effectLst/>
+                        </a:rPr>
+                        <a:t>₹25–35 lakh</a:t>
+                      </a:r>
+                      <a:endParaRPr lang="en-IN" sz="1000" b="0" i="0" u="none" strike="noStrike">
+                        <a:solidFill>
+                          <a:srgbClr val="000000"/>
+                        </a:solidFill>
+                        <a:effectLst/>
+                        <a:latin typeface="Calibri" panose="020F0502020204030204" pitchFamily="34" charset="0"/>
+                      </a:endParaRPr>
+                    </a:p>
+                  </a:txBody>
+                  <a:tcPr marL="6503" marR="6503" marT="6503" marB="0" anchor="ctr"/>
+                </a:tc>
+                <a:extLst>
+                  <a:ext uri="{0D108BD9-81ED-4DB2-BD59-A6C34878D82A}">
+                    <a16:rowId xmlns:a16="http://schemas.microsoft.com/office/drawing/2014/main" val="1247969337"/>
+                  </a:ext>
+                </a:extLst>
+              </a:tr>
+              <a:tr h="624271">
+                <a:tc>
+                  <a:txBody>
+                    <a:bodyPr/>
+                    <a:lstStyle/>
+                    <a:p>
+                      <a:pPr algn="ctr" fontAlgn="ctr"/>
+                      <a:r>
+                        <a:rPr lang="en-IN" sz="1000" b="1" u="none" strike="noStrike" dirty="0">
+                          <a:effectLst/>
+                        </a:rPr>
+                        <a:t>Net ROI (Year 1)</a:t>
+                      </a:r>
+                      <a:endParaRPr lang="en-IN" sz="1000" b="1" i="0" u="none" strike="noStrike" dirty="0">
+                        <a:solidFill>
+                          <a:srgbClr val="000000"/>
+                        </a:solidFill>
+                        <a:effectLst/>
+                        <a:latin typeface="Calibri" panose="020F0502020204030204" pitchFamily="34" charset="0"/>
+                      </a:endParaRPr>
+                    </a:p>
+                  </a:txBody>
+                  <a:tcPr marL="6503" marR="6503" marT="6503" marB="0" anchor="ctr"/>
+                </a:tc>
+                <a:tc>
+                  <a:txBody>
+                    <a:bodyPr/>
+                    <a:lstStyle/>
+                    <a:p>
+                      <a:pPr algn="ctr" fontAlgn="ctr"/>
+                      <a:r>
+                        <a:rPr lang="en-US" sz="1000" u="none" strike="noStrike" dirty="0">
+                          <a:effectLst/>
+                        </a:rPr>
+                        <a:t>₹60–100 lakh in value unlocked</a:t>
+                      </a:r>
+                      <a:endParaRPr lang="en-US" sz="1000" b="1" i="0" u="none" strike="noStrike" dirty="0">
+                        <a:solidFill>
+                          <a:srgbClr val="000000"/>
+                        </a:solidFill>
+                        <a:effectLst/>
+                        <a:latin typeface="Calibri" panose="020F0502020204030204" pitchFamily="34" charset="0"/>
+                      </a:endParaRPr>
+                    </a:p>
+                  </a:txBody>
+                  <a:tcPr marL="6503" marR="6503" marT="6503" marB="0" anchor="ctr"/>
+                </a:tc>
+                <a:extLst>
+                  <a:ext uri="{0D108BD9-81ED-4DB2-BD59-A6C34878D82A}">
+                    <a16:rowId xmlns:a16="http://schemas.microsoft.com/office/drawing/2014/main" val="730933312"/>
+                  </a:ext>
+                </a:extLst>
+              </a:tr>
+            </a:tbl>
+          </a:graphicData>
+        </a:graphic>
+      </p:graphicFrame>
+      <p:sp>
+        <p:nvSpPr>
+          <p:cNvPr id="10" name="TextBox 9">
+            <a:extLst>
+              <a:ext uri="{FF2B5EF4-FFF2-40B4-BE49-F238E27FC236}">
+                <a16:creationId xmlns:a16="http://schemas.microsoft.com/office/drawing/2014/main" id="{BBE2051A-617E-B725-F0E3-4CF9BF0C7EA4}"/>
+              </a:ext>
+            </a:extLst>
+          </p:cNvPr>
+          <p:cNvSpPr txBox="1"/>
+          <p:nvPr/>
+        </p:nvSpPr>
+        <p:spPr>
+          <a:xfrm>
+            <a:off x="6604001" y="5949349"/>
+            <a:ext cx="1913466" cy="338554"/>
+          </a:xfrm>
+          <a:prstGeom prst="rect">
+            <a:avLst/>
+          </a:prstGeom>
+          <a:noFill/>
+        </p:spPr>
+        <p:txBody>
+          <a:bodyPr wrap="square" rtlCol="0">
+            <a:spAutoFit/>
+          </a:bodyPr>
+          <a:lstStyle/>
+          <a:p>
+            <a:r>
+              <a:rPr lang="en-IN" sz="800" dirty="0"/>
+              <a:t>** Projected Estimates with rough calculations and </a:t>
+            </a:r>
+            <a:r>
+              <a:rPr lang="en-IN" sz="800" dirty="0" err="1"/>
+              <a:t>asumptions</a:t>
+            </a:r>
+            <a:endParaRPr lang="en-IN" sz="800" dirty="0"/>
+          </a:p>
+        </p:txBody>
+      </p:sp>
+    </p:spTree>
+    <p:extLst>
+      <p:ext uri="{BB962C8B-B14F-4D97-AF65-F5344CB8AC3E}">
+        <p14:creationId xmlns:p14="http://schemas.microsoft.com/office/powerpoint/2010/main" val="2367142842"/>
+      </p:ext>
+    </p:extLst>
+  </p:cSld>
+  <p:clrMapOvr>
+    <a:masterClrMapping/>
+  </p:clrMapOvr>
+</p:sld>
+</file>
+
+<file path=ppt/slides/slide2.xml><?xml version="1.0" encoding="utf-8"?>
+<p:sld xmlns:a="http://schemas.openxmlformats.org/drawingml/2006/main" xmlns:r="http://schemas.openxmlformats.org/officeDocument/2006/relationships" xmlns:p="http://schemas.openxmlformats.org/presentationml/2006/main">
+  <p:cSld>
+    <p:spTree>
+      <p:nvGrpSpPr>
+        <p:cNvPr id="1" name=""/>
+        <p:cNvGrpSpPr/>
+        <p:nvPr/>
+      </p:nvGrpSpPr>
+      <p:grpSpPr>
+        <a:xfrm>
+          <a:off x="0" y="0"/>
+          <a:ext cx="0" cy="0"/>
+          <a:chOff x="0" y="0"/>
+          <a:chExt cx="0" cy="0"/>
+        </a:xfrm>
+      </p:grpSpPr>
+      <p:sp>
+        <p:nvSpPr>
+          <p:cNvPr id="2" name="Title 1"/>
+          <p:cNvSpPr>
+            <a:spLocks noGrp="1"/>
+          </p:cNvSpPr>
+          <p:nvPr>
+            <p:ph type="title"/>
+          </p:nvPr>
+        </p:nvSpPr>
+        <p:spPr/>
+        <p:txBody>
+          <a:bodyPr/>
+          <a:lstStyle/>
+          <a:p>
+            <a:r>
+              <a:t>Problem Statement</a:t>
+            </a:r>
+          </a:p>
+        </p:txBody>
+      </p:sp>
+      <p:sp>
+        <p:nvSpPr>
+          <p:cNvPr id="3" name="Content Placeholder 2"/>
+          <p:cNvSpPr>
+            <a:spLocks noGrp="1"/>
+          </p:cNvSpPr>
+          <p:nvPr>
+            <p:ph idx="1"/>
+          </p:nvPr>
+        </p:nvSpPr>
+        <p:spPr/>
+        <p:txBody>
+          <a:bodyPr/>
+          <a:lstStyle/>
+          <a:p>
+            <a:r>
+              <a:t>Patients with critical illnesses often lack awareness of available financial aid.</a:t>
+            </a:r>
+          </a:p>
+          <a:p>
+            <a:r>
+              <a:t>Hospitals struggle to coordinate with NGOs, charities, and government schemes.</a:t>
+            </a:r>
+          </a:p>
+          <a:p>
+            <a:r>
+              <a:t>Manual tracking of schemes, donors, and patient eligibility is inefficient.</a:t>
+            </a:r>
+          </a:p>
+        </p:txBody>
+      </p:sp>
+    </p:spTree>
+  </p:cSld>
+  <p:clrMapOvr>
+    <a:masterClrMapping/>
+  </p:clrMapOvr>
+</p:sld>
+</file>
+
+<file path=ppt/slides/slide3.xml><?xml version="1.0" encoding="utf-8"?>
+<p:sld xmlns:a="http://schemas.openxmlformats.org/drawingml/2006/main" xmlns:r="http://schemas.openxmlformats.org/officeDocument/2006/relationships" xmlns:p="http://schemas.openxmlformats.org/presentationml/2006/main">
+  <p:cSld>
+    <p:spTree>
+      <p:nvGrpSpPr>
+        <p:cNvPr id="1" name=""/>
+        <p:cNvGrpSpPr/>
+        <p:nvPr/>
+      </p:nvGrpSpPr>
+      <p:grpSpPr>
+        <a:xfrm>
+          <a:off x="0" y="0"/>
+          <a:ext cx="0" cy="0"/>
+          <a:chOff x="0" y="0"/>
+          <a:chExt cx="0" cy="0"/>
+        </a:xfrm>
+      </p:grpSpPr>
+      <p:sp>
+        <p:nvSpPr>
+          <p:cNvPr id="2" name="Title 1"/>
+          <p:cNvSpPr>
+            <a:spLocks noGrp="1"/>
+          </p:cNvSpPr>
+          <p:nvPr>
+            <p:ph type="title"/>
+          </p:nvPr>
+        </p:nvSpPr>
+        <p:spPr/>
+        <p:txBody>
+          <a:bodyPr>
+            <a:normAutofit fontScale="90000"/>
+          </a:bodyPr>
+          <a:lstStyle/>
+          <a:p>
+            <a:r>
+              <a:t>Transforming Access to Aid with AgentForce</a:t>
+            </a:r>
+          </a:p>
+        </p:txBody>
+      </p:sp>
+      <p:sp>
+        <p:nvSpPr>
+          <p:cNvPr id="3" name="Content Placeholder 2"/>
+          <p:cNvSpPr>
+            <a:spLocks noGrp="1"/>
+          </p:cNvSpPr>
+          <p:nvPr>
+            <p:ph idx="1"/>
+          </p:nvPr>
+        </p:nvSpPr>
+        <p:spPr/>
+        <p:txBody>
+          <a:bodyPr/>
+          <a:lstStyle/>
+          <a:p>
+            <a:r>
+              <a:rPr dirty="0"/>
+              <a:t>Empower patients to discover funding support using AI-powered assistance.</a:t>
+            </a:r>
+          </a:p>
+          <a:p>
+            <a:r>
+              <a:rPr dirty="0"/>
+              <a:t>Enable hospital administrators to manage partnerships and eligibility data efficiently.</a:t>
+            </a:r>
+          </a:p>
+          <a:p>
+            <a:r>
+              <a:rPr dirty="0"/>
+              <a:t>Automate donor communications and </a:t>
+            </a:r>
+            <a:r>
+              <a:rPr lang="en-IN" dirty="0"/>
+              <a:t>patient </a:t>
+            </a:r>
+            <a:r>
+              <a:rPr dirty="0"/>
+              <a:t>case matching.</a:t>
+            </a:r>
+          </a:p>
+        </p:txBody>
+      </p:sp>
+    </p:spTree>
+  </p:cSld>
+  <p:clrMapOvr>
+    <a:masterClrMapping/>
+  </p:clrMapOvr>
+</p:sld>
+</file>
+
+<file path=ppt/slides/slide4.xml><?xml version="1.0" encoding="utf-8"?>
+<p:sld xmlns:a="http://schemas.openxmlformats.org/drawingml/2006/main" xmlns:r="http://schemas.openxmlformats.org/officeDocument/2006/relationships" xmlns:p="http://schemas.openxmlformats.org/presentationml/2006/main">
+  <p:cSld>
+    <p:spTree>
+      <p:nvGrpSpPr>
+        <p:cNvPr id="1" name=""/>
+        <p:cNvGrpSpPr/>
+        <p:nvPr/>
+      </p:nvGrpSpPr>
+      <p:grpSpPr>
+        <a:xfrm>
+          <a:off x="0" y="0"/>
+          <a:ext cx="0" cy="0"/>
+          <a:chOff x="0" y="0"/>
+          <a:chExt cx="0" cy="0"/>
+        </a:xfrm>
+      </p:grpSpPr>
+      <p:sp>
+        <p:nvSpPr>
+          <p:cNvPr id="2" name="Title 1"/>
+          <p:cNvSpPr>
+            <a:spLocks noGrp="1"/>
+          </p:cNvSpPr>
+          <p:nvPr>
+            <p:ph type="title"/>
+          </p:nvPr>
+        </p:nvSpPr>
+        <p:spPr/>
+        <p:txBody>
+          <a:bodyPr/>
+          <a:lstStyle/>
+          <a:p>
+            <a:r>
+              <a:t>Stakeholders</a:t>
+            </a:r>
+          </a:p>
+        </p:txBody>
+      </p:sp>
+      <p:sp>
+        <p:nvSpPr>
+          <p:cNvPr id="3" name="Content Placeholder 2"/>
+          <p:cNvSpPr>
+            <a:spLocks noGrp="1"/>
+          </p:cNvSpPr>
+          <p:nvPr>
+            <p:ph idx="1"/>
+          </p:nvPr>
+        </p:nvSpPr>
+        <p:spPr/>
+        <p:txBody>
+          <a:bodyPr/>
+          <a:lstStyle/>
+          <a:p>
+            <a:r>
+              <a:rPr dirty="0"/>
+              <a:t>Patient: Seeks financial aid → Discover relevant schemes, apply easily.</a:t>
+            </a:r>
+          </a:p>
+          <a:p>
+            <a:r>
+              <a:rPr dirty="0"/>
+              <a:t>Hospital Admin: Coordinates aid → Track, onboard partners, manage cases.</a:t>
+            </a:r>
+          </a:p>
+          <a:p>
+            <a:r>
+              <a:rPr dirty="0"/>
+              <a:t>NGO/Donor: Provides funding → Get matched with genuine needs.</a:t>
+            </a:r>
+          </a:p>
+        </p:txBody>
+      </p:sp>
+    </p:spTree>
+  </p:cSld>
+  <p:clrMapOvr>
+    <a:masterClrMapping/>
+  </p:clrMapOvr>
+</p:sld>
+</file>
+
+<file path=ppt/slides/slide5.xml><?xml version="1.0" encoding="utf-8"?>
+<p:sld xmlns:a="http://schemas.openxmlformats.org/drawingml/2006/main" xmlns:r="http://schemas.openxmlformats.org/officeDocument/2006/relationships" xmlns:p="http://schemas.openxmlformats.org/presentationml/2006/main">
+  <p:cSld>
+    <p:spTree>
+      <p:nvGrpSpPr>
+        <p:cNvPr id="1" name=""/>
+        <p:cNvGrpSpPr/>
+        <p:nvPr/>
+      </p:nvGrpSpPr>
+      <p:grpSpPr>
+        <a:xfrm>
+          <a:off x="0" y="0"/>
+          <a:ext cx="0" cy="0"/>
+          <a:chOff x="0" y="0"/>
+          <a:chExt cx="0" cy="0"/>
+        </a:xfrm>
+      </p:grpSpPr>
+      <p:sp>
+        <p:nvSpPr>
+          <p:cNvPr id="2" name="Title 1"/>
+          <p:cNvSpPr>
+            <a:spLocks noGrp="1"/>
+          </p:cNvSpPr>
+          <p:nvPr>
+            <p:ph type="title"/>
+          </p:nvPr>
+        </p:nvSpPr>
+        <p:spPr/>
+        <p:txBody>
+          <a:bodyPr/>
+          <a:lstStyle/>
+          <a:p>
+            <a:r>
+              <a:t>AgentForce Use Case Scenarios</a:t>
+            </a:r>
+          </a:p>
+        </p:txBody>
+      </p:sp>
+      <p:sp>
+        <p:nvSpPr>
+          <p:cNvPr id="3" name="Content Placeholder 2"/>
+          <p:cNvSpPr>
+            <a:spLocks noGrp="1"/>
+          </p:cNvSpPr>
+          <p:nvPr>
+            <p:ph idx="1"/>
+          </p:nvPr>
+        </p:nvSpPr>
+        <p:spPr/>
+        <p:txBody>
+          <a:bodyPr/>
+          <a:lstStyle/>
+          <a:p>
+            <a:r>
+              <a:rPr dirty="0"/>
+              <a:t>Patients: Search for government/NGO funding based on diagnosis.</a:t>
+            </a:r>
+          </a:p>
+          <a:p>
+            <a:r>
+              <a:rPr dirty="0"/>
+              <a:t>Administrators: Track all schemes, manage donor data, onboard NGOs.</a:t>
+            </a:r>
+          </a:p>
+          <a:p>
+            <a:r>
+              <a:rPr dirty="0"/>
+              <a:t>Donors: Receive alerts for eligible patients based on funding preferences.</a:t>
+            </a:r>
+          </a:p>
+        </p:txBody>
+      </p:sp>
+    </p:spTree>
+  </p:cSld>
+  <p:clrMapOvr>
+    <a:masterClrMapping/>
+  </p:clrMapOvr>
+</p:sld>
+</file>
+
+<file path=ppt/slides/slide6.xml><?xml version="1.0" encoding="utf-8"?>
+<p:sld xmlns:a="http://schemas.openxmlformats.org/drawingml/2006/main" xmlns:r="http://schemas.openxmlformats.org/officeDocument/2006/relationships" xmlns:p="http://schemas.openxmlformats.org/presentationml/2006/main">
+  <p:cSld>
+    <p:spTree>
+      <p:nvGrpSpPr>
+        <p:cNvPr id="1" name=""/>
+        <p:cNvGrpSpPr/>
+        <p:nvPr/>
+      </p:nvGrpSpPr>
+      <p:grpSpPr>
+        <a:xfrm>
+          <a:off x="0" y="0"/>
+          <a:ext cx="0" cy="0"/>
+          <a:chOff x="0" y="0"/>
+          <a:chExt cx="0" cy="0"/>
+        </a:xfrm>
+      </p:grpSpPr>
+      <p:sp>
+        <p:nvSpPr>
+          <p:cNvPr id="2" name="Title 1"/>
+          <p:cNvSpPr>
+            <a:spLocks noGrp="1"/>
+          </p:cNvSpPr>
+          <p:nvPr>
+            <p:ph type="title"/>
+          </p:nvPr>
+        </p:nvSpPr>
+        <p:spPr/>
+        <p:txBody>
+          <a:bodyPr>
+            <a:normAutofit fontScale="90000"/>
+          </a:bodyPr>
+          <a:lstStyle/>
+          <a:p>
+            <a:r>
+              <a:t>Salesforce-Powered Support Ecosystem</a:t>
+            </a:r>
+          </a:p>
+        </p:txBody>
+      </p:sp>
+      <p:sp>
+        <p:nvSpPr>
+          <p:cNvPr id="3" name="Content Placeholder 2"/>
+          <p:cNvSpPr>
+            <a:spLocks noGrp="1"/>
+          </p:cNvSpPr>
+          <p:nvPr>
+            <p:ph idx="1"/>
+          </p:nvPr>
+        </p:nvSpPr>
+        <p:spPr/>
+        <p:txBody>
+          <a:bodyPr/>
+          <a:lstStyle/>
+          <a:p>
+            <a:r>
+              <a:rPr dirty="0"/>
+              <a:t>Agent Interface (Patient/Admin)</a:t>
+            </a:r>
+          </a:p>
+          <a:p>
+            <a:r>
+              <a:rPr dirty="0"/>
+              <a:t>Salesforce Data Cloud (Schemes, Donors, NGOs)</a:t>
+            </a:r>
+            <a:r>
+              <a:rPr lang="en-IN" dirty="0"/>
+              <a:t> **</a:t>
+            </a:r>
+            <a:endParaRPr dirty="0"/>
+          </a:p>
+          <a:p>
+            <a:r>
+              <a:rPr dirty="0"/>
+              <a:t>Flows &amp; Rules Engine</a:t>
+            </a:r>
+          </a:p>
+          <a:p>
+            <a:r>
+              <a:rPr dirty="0"/>
+              <a:t>Email/Notification System</a:t>
+            </a:r>
+          </a:p>
+          <a:p>
+            <a:r>
+              <a:rPr dirty="0"/>
+              <a:t>Integration APIs for scheme databases</a:t>
+            </a:r>
+          </a:p>
+        </p:txBody>
+      </p:sp>
+      <p:sp>
+        <p:nvSpPr>
+          <p:cNvPr id="4" name="TextBox 3">
+            <a:extLst>
+              <a:ext uri="{FF2B5EF4-FFF2-40B4-BE49-F238E27FC236}">
+                <a16:creationId xmlns:a16="http://schemas.microsoft.com/office/drawing/2014/main" id="{29913253-B443-65E1-53D3-33668FBBF268}"/>
+              </a:ext>
+            </a:extLst>
+          </p:cNvPr>
+          <p:cNvSpPr txBox="1"/>
+          <p:nvPr/>
+        </p:nvSpPr>
+        <p:spPr>
+          <a:xfrm>
+            <a:off x="6731001" y="6135669"/>
+            <a:ext cx="1913466" cy="338554"/>
+          </a:xfrm>
+          <a:prstGeom prst="rect">
+            <a:avLst/>
+          </a:prstGeom>
+          <a:noFill/>
+        </p:spPr>
+        <p:txBody>
+          <a:bodyPr wrap="square" rtlCol="0">
+            <a:spAutoFit/>
+          </a:bodyPr>
+          <a:lstStyle/>
+          <a:p>
+            <a:r>
+              <a:rPr lang="en-IN" sz="800" dirty="0"/>
+              <a:t>** Currently not implemented in hackathon use case</a:t>
+            </a:r>
+          </a:p>
+        </p:txBody>
+      </p:sp>
+    </p:spTree>
+  </p:cSld>
+  <p:clrMapOvr>
+    <a:masterClrMapping/>
+  </p:clrMapOvr>
+</p:sld>
+</file>
+
+<file path=ppt/slides/slide7.xml><?xml version="1.0" encoding="utf-8"?>
+<p:sld xmlns:a="http://schemas.openxmlformats.org/drawingml/2006/main" xmlns:r="http://schemas.openxmlformats.org/officeDocument/2006/relationships" xmlns:p="http://schemas.openxmlformats.org/presentationml/2006/main">
+  <p:cSld>
+    <p:spTree>
+      <p:nvGrpSpPr>
+        <p:cNvPr id="1" name=""/>
+        <p:cNvGrpSpPr/>
+        <p:nvPr/>
+      </p:nvGrpSpPr>
+      <p:grpSpPr>
+        <a:xfrm>
+          <a:off x="0" y="0"/>
+          <a:ext cx="0" cy="0"/>
+          <a:chOff x="0" y="0"/>
+          <a:chExt cx="0" cy="0"/>
+        </a:xfrm>
+      </p:grpSpPr>
+      <p:sp>
+        <p:nvSpPr>
+          <p:cNvPr id="2" name="Title 1"/>
+          <p:cNvSpPr>
+            <a:spLocks noGrp="1"/>
+          </p:cNvSpPr>
+          <p:nvPr>
+            <p:ph type="title"/>
+          </p:nvPr>
+        </p:nvSpPr>
+        <p:spPr/>
+        <p:txBody>
+          <a:bodyPr/>
+          <a:lstStyle/>
+          <a:p>
+            <a:r>
+              <a:t>Value Delivered</a:t>
+            </a:r>
+          </a:p>
+        </p:txBody>
+      </p:sp>
+      <p:sp>
+        <p:nvSpPr>
+          <p:cNvPr id="3" name="Content Placeholder 2"/>
+          <p:cNvSpPr>
+            <a:spLocks noGrp="1"/>
+          </p:cNvSpPr>
+          <p:nvPr>
+            <p:ph idx="1"/>
+          </p:nvPr>
+        </p:nvSpPr>
+        <p:spPr/>
+        <p:txBody>
+          <a:bodyPr/>
+          <a:lstStyle/>
+          <a:p>
+            <a:r>
+              <a:rPr dirty="0"/>
+              <a:t>Improved patient access to financial aid.</a:t>
+            </a:r>
+          </a:p>
+          <a:p>
+            <a:r>
+              <a:rPr dirty="0"/>
+              <a:t>Reduced admin workload and manual tracking.</a:t>
+            </a:r>
+          </a:p>
+          <a:p>
+            <a:r>
+              <a:rPr dirty="0"/>
+              <a:t>Stronger partnerships with NGOs/charities.</a:t>
+            </a:r>
+          </a:p>
+          <a:p>
+            <a:r>
+              <a:rPr dirty="0"/>
+              <a:t>Personalized and timely donor engagement.</a:t>
+            </a:r>
+          </a:p>
+        </p:txBody>
+      </p:sp>
+    </p:spTree>
+  </p:cSld>
+  <p:clrMapOvr>
+    <a:masterClrMapping/>
+  </p:clrMapOvr>
+</p:sld>
+</file>
+
+<file path=ppt/slides/slide8.xml><?xml version="1.0" encoding="utf-8"?>
+<p:sld xmlns:a="http://schemas.openxmlformats.org/drawingml/2006/main" xmlns:r="http://schemas.openxmlformats.org/officeDocument/2006/relationships" xmlns:p="http://schemas.openxmlformats.org/presentationml/2006/main">
+  <p:cSld>
+    <p:spTree>
+      <p:nvGrpSpPr>
+        <p:cNvPr id="1" name=""/>
+        <p:cNvGrpSpPr/>
+        <p:nvPr/>
+      </p:nvGrpSpPr>
+      <p:grpSpPr>
+        <a:xfrm>
+          <a:off x="0" y="0"/>
+          <a:ext cx="0" cy="0"/>
+          <a:chOff x="0" y="0"/>
+          <a:chExt cx="0" cy="0"/>
+        </a:xfrm>
+      </p:grpSpPr>
+      <p:sp>
+        <p:nvSpPr>
+          <p:cNvPr id="2" name="Title 1"/>
+          <p:cNvSpPr>
+            <a:spLocks noGrp="1"/>
+          </p:cNvSpPr>
+          <p:nvPr>
+            <p:ph type="title"/>
+          </p:nvPr>
+        </p:nvSpPr>
+        <p:spPr/>
+        <p:txBody>
+          <a:bodyPr/>
+          <a:lstStyle/>
+          <a:p>
+            <a:r>
+              <a:t>Implementation Roadmap</a:t>
+            </a:r>
+          </a:p>
+        </p:txBody>
+      </p:sp>
+      <p:sp>
+        <p:nvSpPr>
+          <p:cNvPr id="3" name="Content Placeholder 2"/>
+          <p:cNvSpPr>
+            <a:spLocks noGrp="1"/>
+          </p:cNvSpPr>
+          <p:nvPr>
+            <p:ph idx="1"/>
+          </p:nvPr>
+        </p:nvSpPr>
+        <p:spPr/>
+        <p:txBody>
+          <a:bodyPr/>
+          <a:lstStyle/>
+          <a:p>
+            <a:r>
+              <a:rPr dirty="0"/>
+              <a:t>Phase 1: MVP with patient discovery and scheme tracking.</a:t>
+            </a:r>
+          </a:p>
+          <a:p>
+            <a:r>
+              <a:rPr dirty="0"/>
+              <a:t>Phase 2: Admin tools for onboarding NGOs and donors.</a:t>
+            </a:r>
+          </a:p>
+          <a:p>
+            <a:r>
+              <a:rPr dirty="0"/>
+              <a:t>Phase 3: Automated matching and communication flows.</a:t>
+            </a:r>
+          </a:p>
+          <a:p>
+            <a:r>
+              <a:rPr dirty="0"/>
+              <a:t>Pilot launch with selected hospitals and charities.</a:t>
+            </a:r>
+          </a:p>
+        </p:txBody>
+      </p:sp>
+    </p:spTree>
+  </p:cSld>
+  <p:clrMapOvr>
+    <a:masterClrMapping/>
+  </p:clrMapOvr>
+</p:sld>
+</file>
+
+<file path=ppt/slides/slide9.xml><?xml version="1.0" encoding="utf-8"?>
+<p:sld xmlns:a="http://schemas.openxmlformats.org/drawingml/2006/main" xmlns:r="http://schemas.openxmlformats.org/officeDocument/2006/relationships" xmlns:p="http://schemas.openxmlformats.org/presentationml/2006/main">
+  <p:cSld>
+    <p:spTree>
+      <p:nvGrpSpPr>
+        <p:cNvPr id="1" name=""/>
+        <p:cNvGrpSpPr/>
+        <p:nvPr/>
+      </p:nvGrpSpPr>
+      <p:grpSpPr>
+        <a:xfrm>
+          <a:off x="0" y="0"/>
+          <a:ext cx="0" cy="0"/>
+          <a:chOff x="0" y="0"/>
+          <a:chExt cx="0" cy="0"/>
+        </a:xfrm>
+      </p:grpSpPr>
+      <p:sp>
+        <p:nvSpPr>
+          <p:cNvPr id="2" name="Title 1">
+            <a:extLst>
+              <a:ext uri="{FF2B5EF4-FFF2-40B4-BE49-F238E27FC236}">
+                <a16:creationId xmlns:a16="http://schemas.microsoft.com/office/drawing/2014/main" id="{CC057AD4-B49F-3B99-EF70-F2B652B57339}"/>
+              </a:ext>
+            </a:extLst>
+          </p:cNvPr>
+          <p:cNvSpPr>
+            <a:spLocks noGrp="1"/>
+          </p:cNvSpPr>
+          <p:nvPr>
+            <p:ph type="title"/>
+          </p:nvPr>
+        </p:nvSpPr>
+        <p:spPr/>
+        <p:txBody>
+          <a:bodyPr/>
+          <a:lstStyle/>
+          <a:p>
+            <a:r>
+              <a:rPr lang="en-IN" dirty="0"/>
+              <a:t>Future Product Road Map</a:t>
+            </a:r>
+          </a:p>
+        </p:txBody>
+      </p:sp>
+      <p:sp>
+        <p:nvSpPr>
+          <p:cNvPr id="3" name="Content Placeholder 2">
+            <a:extLst>
+              <a:ext uri="{FF2B5EF4-FFF2-40B4-BE49-F238E27FC236}">
+                <a16:creationId xmlns:a16="http://schemas.microsoft.com/office/drawing/2014/main" id="{01641066-63C3-0522-561B-A1B19EA73800}"/>
+              </a:ext>
+            </a:extLst>
+          </p:cNvPr>
+          <p:cNvSpPr>
+            <a:spLocks noGrp="1"/>
+          </p:cNvSpPr>
+          <p:nvPr>
+            <p:ph idx="1"/>
+          </p:nvPr>
+        </p:nvSpPr>
+        <p:spPr>
+          <a:xfrm>
+            <a:off x="864382" y="2252133"/>
+            <a:ext cx="7822418" cy="3767667"/>
+          </a:xfrm>
+        </p:spPr>
+        <p:txBody>
+          <a:bodyPr>
+            <a:normAutofit fontScale="40000" lnSpcReduction="20000"/>
+          </a:bodyPr>
+          <a:lstStyle/>
+          <a:p>
+            <a:r>
+              <a:rPr lang="en-IN" sz="1800" b="1" dirty="0">
+                <a:effectLst/>
+                <a:latin typeface="Calibri" panose="020F0502020204030204" pitchFamily="34" charset="0"/>
+              </a:rPr>
+              <a:t>AI-Powered Eligibility Engine</a:t>
+            </a:r>
+          </a:p>
+          <a:p>
+            <a:pPr marL="617220" lvl="2">
+              <a:buFont typeface="Courier New" panose="02070309020205020404" pitchFamily="49" charset="0"/>
+              <a:buChar char="o"/>
+            </a:pPr>
+            <a:r>
+              <a:rPr lang="en-IN" sz="1900" dirty="0">
+                <a:effectLst/>
+                <a:latin typeface="Calibri" panose="020F0502020204030204" pitchFamily="34" charset="0"/>
+              </a:rPr>
+              <a:t>Use Salesforce Einstein to recommend the most relevant schemes or donors based on patient profiles, historical data, and real-time inputs.</a:t>
+            </a:r>
+          </a:p>
+          <a:p>
+            <a:pPr marL="617220" lvl="2">
+              <a:buFont typeface="Courier New" panose="02070309020205020404" pitchFamily="49" charset="0"/>
+              <a:buChar char="o"/>
+            </a:pPr>
+            <a:r>
+              <a:rPr lang="en-IN" sz="1900" dirty="0">
+                <a:effectLst/>
+                <a:latin typeface="Calibri" panose="020F0502020204030204" pitchFamily="34" charset="0"/>
+              </a:rPr>
+              <a:t> Natural language intake (e.g., "I need help with heart surgery") converted to structured search.</a:t>
+            </a:r>
+          </a:p>
+          <a:p>
+            <a:r>
+              <a:rPr lang="en-IN" sz="1800" b="1" dirty="0">
+                <a:effectLst/>
+                <a:latin typeface="Calibri" panose="020F0502020204030204" pitchFamily="34" charset="0"/>
+              </a:rPr>
+              <a:t>Patient Document Upload &amp; Verification</a:t>
+            </a:r>
+          </a:p>
+          <a:p>
+            <a:pPr marL="617220" lvl="2">
+              <a:buFont typeface="Courier New" panose="02070309020205020404" pitchFamily="49" charset="0"/>
+              <a:buChar char="o"/>
+            </a:pPr>
+            <a:r>
+              <a:rPr lang="en-IN" sz="1900" dirty="0">
+                <a:effectLst/>
+                <a:latin typeface="Calibri" panose="020F0502020204030204" pitchFamily="34" charset="0"/>
+              </a:rPr>
+              <a:t>Enable patients to securely upload medical records or income proof.</a:t>
+            </a:r>
+          </a:p>
+          <a:p>
+            <a:pPr marL="617220" lvl="2">
+              <a:buFont typeface="Courier New" panose="02070309020205020404" pitchFamily="49" charset="0"/>
+              <a:buChar char="o"/>
+            </a:pPr>
+            <a:r>
+              <a:rPr lang="en-IN" sz="1900" dirty="0">
+                <a:effectLst/>
+                <a:latin typeface="Calibri" panose="020F0502020204030204" pitchFamily="34" charset="0"/>
+              </a:rPr>
+              <a:t>Auto-validate document completeness using AI or predefined templates.</a:t>
+            </a:r>
+          </a:p>
+          <a:p>
+            <a:r>
+              <a:rPr lang="en-IN" sz="1800" b="1" dirty="0">
+                <a:effectLst/>
+                <a:latin typeface="Calibri" panose="020F0502020204030204" pitchFamily="34" charset="0"/>
+              </a:rPr>
+              <a:t>Real-Time Donor-Pledge Tracking</a:t>
+            </a:r>
+          </a:p>
+          <a:p>
+            <a:pPr lvl="1">
+              <a:buFont typeface="Courier New" panose="02070309020205020404" pitchFamily="49" charset="0"/>
+              <a:buChar char="o"/>
+            </a:pPr>
+            <a:r>
+              <a:rPr lang="en-IN" sz="2300" dirty="0">
+                <a:effectLst/>
+                <a:latin typeface="Calibri" panose="020F0502020204030204" pitchFamily="34" charset="0"/>
+              </a:rPr>
+              <a:t>Allow donors to pledge support in real time. View status of matching patients, funds disbursed, and impact reports.</a:t>
+            </a:r>
+            <a:endParaRPr lang="en-IN" sz="2300" dirty="0">
+              <a:latin typeface="Calibri" panose="020F0502020204030204" pitchFamily="34" charset="0"/>
+            </a:endParaRPr>
+          </a:p>
+          <a:p>
+            <a:r>
+              <a:rPr lang="en-IN" sz="1800" b="1" dirty="0">
+                <a:effectLst/>
+                <a:latin typeface="Calibri" panose="020F0502020204030204" pitchFamily="34" charset="0"/>
+              </a:rPr>
+              <a:t>Chatbot Multilingual Support</a:t>
+            </a:r>
+          </a:p>
+          <a:p>
+            <a:r>
+              <a:rPr lang="en-IN" sz="1800" b="1" dirty="0">
+                <a:effectLst/>
+                <a:latin typeface="Calibri" panose="020F0502020204030204" pitchFamily="34" charset="0"/>
+              </a:rPr>
+              <a:t>Integrated Payment Gateway</a:t>
+            </a:r>
+          </a:p>
+          <a:p>
+            <a:pPr lvl="1">
+              <a:buFont typeface="Courier New" panose="02070309020205020404" pitchFamily="49" charset="0"/>
+              <a:buChar char="o"/>
+            </a:pPr>
+            <a:r>
+              <a:rPr lang="en-IN" sz="2300" dirty="0">
+                <a:effectLst/>
+                <a:latin typeface="Calibri" panose="020F0502020204030204" pitchFamily="34" charset="0"/>
+              </a:rPr>
+              <a:t>Allow donors to directly fund patient bills via integrated donation platform with transparency and receipts. Auto-link hospital finance departments and notify stakeholders.</a:t>
+            </a:r>
+            <a:endParaRPr lang="en-IN" sz="2300" dirty="0">
+              <a:latin typeface="Calibri" panose="020F0502020204030204" pitchFamily="34" charset="0"/>
+            </a:endParaRPr>
+          </a:p>
+          <a:p>
+            <a:r>
+              <a:rPr lang="en-IN" sz="1800" b="1" dirty="0">
+                <a:effectLst/>
+                <a:latin typeface="Calibri" panose="020F0502020204030204" pitchFamily="34" charset="0"/>
+              </a:rPr>
+              <a:t>Impact Analytics Dashboard</a:t>
+            </a:r>
+          </a:p>
+          <a:p>
+            <a:pPr lvl="1">
+              <a:buFont typeface="Courier New" panose="02070309020205020404" pitchFamily="49" charset="0"/>
+              <a:buChar char="o"/>
+            </a:pPr>
+            <a:r>
+              <a:rPr lang="en-IN" sz="2300" dirty="0">
+                <a:effectLst/>
+                <a:latin typeface="Calibri" panose="020F0502020204030204" pitchFamily="34" charset="0"/>
+              </a:rPr>
+              <a:t>Track total funds raised, lives impacted, successful scheme matches. Breakdown by geography, disease type, donor contribution, etc.</a:t>
+            </a:r>
+          </a:p>
+          <a:p>
+            <a:r>
+              <a:rPr lang="en-IN" sz="1800" b="1" dirty="0">
+                <a:effectLst/>
+                <a:latin typeface="Calibri" panose="020F0502020204030204" pitchFamily="34" charset="0"/>
+              </a:rPr>
+              <a:t>Self-Service NGO/Donor Portal</a:t>
+            </a:r>
+          </a:p>
+          <a:p>
+            <a:pPr lvl="1">
+              <a:buFont typeface="Courier New" panose="02070309020205020404" pitchFamily="49" charset="0"/>
+              <a:buChar char="o"/>
+            </a:pPr>
+            <a:r>
+              <a:rPr lang="en-IN" sz="2300" dirty="0">
+                <a:effectLst/>
+                <a:latin typeface="Calibri" panose="020F0502020204030204" pitchFamily="34" charset="0"/>
+              </a:rPr>
+              <a:t>NGOs/charities can self-register, set preferences, and track how their funds are used. Approve or auto-match cases using pre-configured logic.</a:t>
+            </a:r>
+            <a:r>
+              <a:rPr lang="en-IN" dirty="0">
+                <a:effectLst/>
+                <a:latin typeface="Calibri" panose="020F0502020204030204" pitchFamily="34" charset="0"/>
+              </a:rPr>
+              <a:t>	</a:t>
+            </a:r>
+            <a:endParaRPr lang="en-IN" dirty="0">
+              <a:latin typeface="Calibri" panose="020F0502020204030204" pitchFamily="34" charset="0"/>
+            </a:endParaRPr>
+          </a:p>
+          <a:p>
+            <a:r>
+              <a:rPr lang="en-IN" sz="1800" b="1" dirty="0">
+                <a:effectLst/>
+                <a:latin typeface="Calibri" panose="020F0502020204030204" pitchFamily="34" charset="0"/>
+              </a:rPr>
+              <a:t>Mobile App Companion</a:t>
+            </a:r>
+            <a:endParaRPr lang="en-IN" b="1" dirty="0"/>
+          </a:p>
+        </p:txBody>
+      </p:sp>
+    </p:spTree>
+    <p:extLst>
+      <p:ext uri="{BB962C8B-B14F-4D97-AF65-F5344CB8AC3E}">
+        <p14:creationId xmlns:p14="http://schemas.microsoft.com/office/powerpoint/2010/main" val="3848795624"/>
+      </p:ext>
+    </p:extLst>
+  </p:cSld>
+  <p:clrMapOvr>
+    <a:masterClrMapping/>
+  </p:clrMapOvr>
+</p:sld>
+</file>
+
 <file path=ppt/theme/theme1.xml><?xml version="1.0" encoding="utf-8"?>
 <a:theme xmlns:a="http://schemas.openxmlformats.org/drawingml/2006/main" name="Ion Boardroom">
   <a:themeElements>
